--- a/skills/project-docs/screen-design-doc/templates/[양식] 화면설계서.pptx
+++ b/skills/project-docs/screen-design-doc/templates/[양식] 화면설계서.pptx
@@ -18,7 +18,6 @@
     <p:sldId id="277" r:id="rId6"/>
     <p:sldId id="273" r:id="rId7"/>
     <p:sldId id="274" r:id="rId8"/>
-    <p:sldId id="278" r:id="rId9"/>
     <p:sldId id="279" r:id="rId10"/>
   </p:sldIdLst>
   <p:sldSz cx="12192000" cy="6858000"/>
@@ -39900,3841 +39899,6 @@
 </p:sld>
 </file>
 
-<file path=ppt/slides/slide8.xml><?xml version="1.0" encoding="utf-8"?>
-<p:sld xmlns:a="http://schemas.openxmlformats.org/drawingml/2006/main" xmlns:r="http://schemas.openxmlformats.org/officeDocument/2006/relationships" xmlns:p="http://schemas.openxmlformats.org/presentationml/2006/main">
-  <p:cSld>
-    <p:spTree>
-      <p:nvGrpSpPr>
-        <p:cNvPr id="1" name=""/>
-        <p:cNvGrpSpPr/>
-        <p:nvPr/>
-      </p:nvGrpSpPr>
-      <p:grpSpPr>
-        <a:xfrm>
-          <a:off x="0" y="0"/>
-          <a:ext cx="0" cy="0"/>
-          <a:chOff x="0" y="0"/>
-          <a:chExt cx="0" cy="0"/>
-        </a:xfrm>
-      </p:grpSpPr>
-      <p:sp>
-        <p:nvSpPr>
-          <p:cNvPr id="3" name="Title 1"/>
-          <p:cNvSpPr>
-            <a:spLocks noGrp="1"/>
-          </p:cNvSpPr>
-          <p:nvPr>
-            <p:ph type="title"/>
-          </p:nvPr>
-        </p:nvSpPr>
-        <p:spPr/>
-        <p:txBody>
-          <a:bodyPr/>
-          <a:lstStyle/>
-          <a:p>
-            <a:r>
-              <a:rPr>
-                <a:latin typeface="맑은 고딕"/>
-                <a:ea typeface="맑은 고딕"/>
-              </a:rPr>
-              <a:t>Logic process · 후보 시간 산출과 확정</a:t>
-            </a:r>
-          </a:p>
-        </p:txBody>
-      </p:sp>
-      <p:sp>
-        <p:nvSpPr>
-          <p:cNvPr id="4" name="TextBox 4">
-            <a:extLst>
-              <a:ext uri="{FF2B5EF4-FFF2-40B4-BE49-F238E27FC236}">
-                <a16:creationId xmlns:a16="http://schemas.microsoft.com/office/drawing/2014/main" id="{90B8312E-970E-458B-87FB-84F7A22C22BA}"/>
-              </a:ext>
-            </a:extLst>
-          </p:cNvPr>
-          <p:cNvSpPr txBox="1"/>
-          <p:nvPr/>
-        </p:nvSpPr>
-        <p:spPr>
-          <a:xfrm>
-            <a:off x="11780252" y="106980"/>
-            <a:ext cx="248786" cy="230832"/>
-          </a:xfrm>
-          <a:prstGeom prst="rect">
-            <a:avLst/>
-          </a:prstGeom>
-          <a:noFill/>
-        </p:spPr>
-        <p:txBody>
-          <a:bodyPr wrap="none" rtlCol="0">
-            <a:spAutoFit/>
-          </a:bodyPr>
-          <a:lstStyle/>
-          <a:p>
-            <a:r>
-              <a:rPr>
-                <a:latin typeface="맑은 고딕"/>
-                <a:ea typeface="맑은 고딕"/>
-              </a:rPr>
-              <a:t>12</a:t>
-            </a:r>
-          </a:p>
-        </p:txBody>
-      </p:sp>
-      <p:sp>
-        <p:nvSpPr>
-          <p:cNvPr id="5" name="Rectangle 5"/>
-          <p:cNvSpPr/>
-          <p:nvPr/>
-        </p:nvSpPr>
-        <p:spPr>
-          <a:xfrm>
-            <a:off x="432000" y="1368000"/>
-            <a:ext cx="2835000" cy="324000"/>
-          </a:xfrm>
-          <a:prstGeom prst="rect">
-            <a:avLst/>
-          </a:prstGeom>
-          <a:solidFill>
-            <a:srgbClr val="D9D9D9"/>
-          </a:solidFill>
-          <a:ln>
-            <a:solidFill>
-              <a:srgbClr val="BFBFBF"/>
-            </a:solidFill>
-          </a:ln>
-          <a:effectLst/>
-        </p:spPr>
-        <p:style>
-          <a:lnRef idx="1">
-            <a:schemeClr val="accent1"/>
-          </a:lnRef>
-          <a:fillRef idx="3">
-            <a:schemeClr val="accent1"/>
-          </a:fillRef>
-          <a:effectRef idx="2">
-            <a:schemeClr val="accent1"/>
-          </a:effectRef>
-          <a:fontRef idx="minor">
-            <a:schemeClr val="lt1"/>
-          </a:fontRef>
-        </p:style>
-        <p:txBody>
-          <a:bodyPr rtlCol="0" anchor="ctr"/>
-          <a:lstStyle/>
-          <a:p>
-            <a:pPr algn="ctr"/>
-            <a:endParaRPr/>
-          </a:p>
-        </p:txBody>
-      </p:sp>
-      <p:sp>
-        <p:nvSpPr>
-          <p:cNvPr id="6" name="Rectangle 6"/>
-          <p:cNvSpPr/>
-          <p:nvPr/>
-        </p:nvSpPr>
-        <p:spPr>
-          <a:xfrm>
-            <a:off x="432000" y="1692000"/>
-            <a:ext cx="2835000" cy="4608000"/>
-          </a:xfrm>
-          <a:prstGeom prst="rect">
-            <a:avLst/>
-          </a:prstGeom>
-          <a:noFill/>
-          <a:ln>
-            <a:solidFill>
-              <a:srgbClr val="BFBFBF"/>
-            </a:solidFill>
-          </a:ln>
-          <a:effectLst/>
-        </p:spPr>
-        <p:style>
-          <a:lnRef idx="1">
-            <a:schemeClr val="accent1"/>
-          </a:lnRef>
-          <a:fillRef idx="3">
-            <a:schemeClr val="accent1"/>
-          </a:fillRef>
-          <a:effectRef idx="2">
-            <a:schemeClr val="accent1"/>
-          </a:effectRef>
-          <a:fontRef idx="minor">
-            <a:schemeClr val="lt1"/>
-          </a:fontRef>
-        </p:style>
-        <p:txBody>
-          <a:bodyPr rtlCol="0" anchor="ctr"/>
-          <a:lstStyle/>
-          <a:p>
-            <a:pPr algn="ctr"/>
-            <a:endParaRPr/>
-          </a:p>
-        </p:txBody>
-      </p:sp>
-      <p:sp>
-        <p:nvSpPr>
-          <p:cNvPr id="7" name="TextBox 7"/>
-          <p:cNvSpPr txBox="1"/>
-          <p:nvPr/>
-        </p:nvSpPr>
-        <p:spPr>
-          <a:xfrm>
-            <a:off x="486000" y="1425600"/>
-            <a:ext cx="2727000" cy="216000"/>
-          </a:xfrm>
-          <a:prstGeom prst="rect">
-            <a:avLst/>
-          </a:prstGeom>
-          <a:noFill/>
-        </p:spPr>
-        <p:txBody>
-          <a:bodyPr wrap="square">
-            <a:spAutoFit/>
-          </a:bodyPr>
-          <a:lstStyle/>
-          <a:p>
-            <a:r>
-              <a:rPr sz="900" b="1">
-                <a:solidFill>
-                  <a:srgbClr val="1A1A1A"/>
-                </a:solidFill>
-                <a:latin typeface="맑은 고딕"/>
-                <a:ea typeface="맑은 고딕"/>
-              </a:rPr>
-              <a:t>입력</a:t>
-            </a:r>
-          </a:p>
-        </p:txBody>
-      </p:sp>
-      <p:sp>
-        <p:nvSpPr>
-          <p:cNvPr id="8" name="Rectangle 8"/>
-          <p:cNvSpPr/>
-          <p:nvPr/>
-        </p:nvSpPr>
-        <p:spPr>
-          <a:xfrm>
-            <a:off x="3267000" y="1368000"/>
-            <a:ext cx="2835000" cy="324000"/>
-          </a:xfrm>
-          <a:prstGeom prst="rect">
-            <a:avLst/>
-          </a:prstGeom>
-          <a:solidFill>
-            <a:srgbClr val="D9D9D9"/>
-          </a:solidFill>
-          <a:ln>
-            <a:solidFill>
-              <a:srgbClr val="BFBFBF"/>
-            </a:solidFill>
-          </a:ln>
-          <a:effectLst/>
-        </p:spPr>
-        <p:style>
-          <a:lnRef idx="1">
-            <a:schemeClr val="accent1"/>
-          </a:lnRef>
-          <a:fillRef idx="3">
-            <a:schemeClr val="accent1"/>
-          </a:fillRef>
-          <a:effectRef idx="2">
-            <a:schemeClr val="accent1"/>
-          </a:effectRef>
-          <a:fontRef idx="minor">
-            <a:schemeClr val="lt1"/>
-          </a:fontRef>
-        </p:style>
-        <p:txBody>
-          <a:bodyPr rtlCol="0" anchor="ctr"/>
-          <a:lstStyle/>
-          <a:p>
-            <a:pPr algn="ctr"/>
-            <a:endParaRPr/>
-          </a:p>
-        </p:txBody>
-      </p:sp>
-      <p:sp>
-        <p:nvSpPr>
-          <p:cNvPr id="9" name="Rectangle 9"/>
-          <p:cNvSpPr/>
-          <p:nvPr/>
-        </p:nvSpPr>
-        <p:spPr>
-          <a:xfrm>
-            <a:off x="3267000" y="1692000"/>
-            <a:ext cx="2835000" cy="4608000"/>
-          </a:xfrm>
-          <a:prstGeom prst="rect">
-            <a:avLst/>
-          </a:prstGeom>
-          <a:noFill/>
-          <a:ln>
-            <a:solidFill>
-              <a:srgbClr val="BFBFBF"/>
-            </a:solidFill>
-          </a:ln>
-          <a:effectLst/>
-        </p:spPr>
-        <p:style>
-          <a:lnRef idx="1">
-            <a:schemeClr val="accent1"/>
-          </a:lnRef>
-          <a:fillRef idx="3">
-            <a:schemeClr val="accent1"/>
-          </a:fillRef>
-          <a:effectRef idx="2">
-            <a:schemeClr val="accent1"/>
-          </a:effectRef>
-          <a:fontRef idx="minor">
-            <a:schemeClr val="lt1"/>
-          </a:fontRef>
-        </p:style>
-        <p:txBody>
-          <a:bodyPr rtlCol="0" anchor="ctr"/>
-          <a:lstStyle/>
-          <a:p>
-            <a:pPr algn="ctr"/>
-            <a:endParaRPr/>
-          </a:p>
-        </p:txBody>
-      </p:sp>
-      <p:sp>
-        <p:nvSpPr>
-          <p:cNvPr id="10" name="TextBox 10"/>
-          <p:cNvSpPr txBox="1"/>
-          <p:nvPr/>
-        </p:nvSpPr>
-        <p:spPr>
-          <a:xfrm>
-            <a:off x="3321000" y="1425600"/>
-            <a:ext cx="2727000" cy="216000"/>
-          </a:xfrm>
-          <a:prstGeom prst="rect">
-            <a:avLst/>
-          </a:prstGeom>
-          <a:noFill/>
-        </p:spPr>
-        <p:txBody>
-          <a:bodyPr wrap="square">
-            <a:spAutoFit/>
-          </a:bodyPr>
-          <a:lstStyle/>
-          <a:p>
-            <a:r>
-              <a:rPr sz="900" b="1">
-                <a:solidFill>
-                  <a:srgbClr val="1A1A1A"/>
-                </a:solidFill>
-                <a:latin typeface="맑은 고딕"/>
-                <a:ea typeface="맑은 고딕"/>
-              </a:rPr>
-              <a:t>산출</a:t>
-            </a:r>
-          </a:p>
-        </p:txBody>
-      </p:sp>
-      <p:sp>
-        <p:nvSpPr>
-          <p:cNvPr id="11" name="Rectangle 11"/>
-          <p:cNvSpPr/>
-          <p:nvPr/>
-        </p:nvSpPr>
-        <p:spPr>
-          <a:xfrm>
-            <a:off x="6102000" y="1368000"/>
-            <a:ext cx="2835000" cy="324000"/>
-          </a:xfrm>
-          <a:prstGeom prst="rect">
-            <a:avLst/>
-          </a:prstGeom>
-          <a:solidFill>
-            <a:srgbClr val="D9D9D9"/>
-          </a:solidFill>
-          <a:ln>
-            <a:solidFill>
-              <a:srgbClr val="BFBFBF"/>
-            </a:solidFill>
-          </a:ln>
-          <a:effectLst/>
-        </p:spPr>
-        <p:style>
-          <a:lnRef idx="1">
-            <a:schemeClr val="accent1"/>
-          </a:lnRef>
-          <a:fillRef idx="3">
-            <a:schemeClr val="accent1"/>
-          </a:fillRef>
-          <a:effectRef idx="2">
-            <a:schemeClr val="accent1"/>
-          </a:effectRef>
-          <a:fontRef idx="minor">
-            <a:schemeClr val="lt1"/>
-          </a:fontRef>
-        </p:style>
-        <p:txBody>
-          <a:bodyPr rtlCol="0" anchor="ctr"/>
-          <a:lstStyle/>
-          <a:p>
-            <a:pPr algn="ctr"/>
-            <a:endParaRPr/>
-          </a:p>
-        </p:txBody>
-      </p:sp>
-      <p:sp>
-        <p:nvSpPr>
-          <p:cNvPr id="12" name="Rectangle 12"/>
-          <p:cNvSpPr/>
-          <p:nvPr/>
-        </p:nvSpPr>
-        <p:spPr>
-          <a:xfrm>
-            <a:off x="6102000" y="1692000"/>
-            <a:ext cx="2835000" cy="4608000"/>
-          </a:xfrm>
-          <a:prstGeom prst="rect">
-            <a:avLst/>
-          </a:prstGeom>
-          <a:noFill/>
-          <a:ln>
-            <a:solidFill>
-              <a:srgbClr val="BFBFBF"/>
-            </a:solidFill>
-          </a:ln>
-          <a:effectLst/>
-        </p:spPr>
-        <p:style>
-          <a:lnRef idx="1">
-            <a:schemeClr val="accent1"/>
-          </a:lnRef>
-          <a:fillRef idx="3">
-            <a:schemeClr val="accent1"/>
-          </a:fillRef>
-          <a:effectRef idx="2">
-            <a:schemeClr val="accent1"/>
-          </a:effectRef>
-          <a:fontRef idx="minor">
-            <a:schemeClr val="lt1"/>
-          </a:fontRef>
-        </p:style>
-        <p:txBody>
-          <a:bodyPr rtlCol="0" anchor="ctr"/>
-          <a:lstStyle/>
-          <a:p>
-            <a:pPr algn="ctr"/>
-            <a:endParaRPr/>
-          </a:p>
-        </p:txBody>
-      </p:sp>
-      <p:sp>
-        <p:nvSpPr>
-          <p:cNvPr id="13" name="TextBox 13"/>
-          <p:cNvSpPr txBox="1"/>
-          <p:nvPr/>
-        </p:nvSpPr>
-        <p:spPr>
-          <a:xfrm>
-            <a:off x="6156000" y="1425600"/>
-            <a:ext cx="2727000" cy="216000"/>
-          </a:xfrm>
-          <a:prstGeom prst="rect">
-            <a:avLst/>
-          </a:prstGeom>
-          <a:noFill/>
-        </p:spPr>
-        <p:txBody>
-          <a:bodyPr wrap="square">
-            <a:spAutoFit/>
-          </a:bodyPr>
-          <a:lstStyle/>
-          <a:p>
-            <a:r>
-              <a:rPr sz="900" b="1">
-                <a:solidFill>
-                  <a:srgbClr val="1A1A1A"/>
-                </a:solidFill>
-                <a:latin typeface="맑은 고딕"/>
-                <a:ea typeface="맑은 고딕"/>
-              </a:rPr>
-              <a:t>투표와 확정</a:t>
-            </a:r>
-          </a:p>
-        </p:txBody>
-      </p:sp>
-      <p:sp>
-        <p:nvSpPr>
-          <p:cNvPr id="14" name="Rectangle 14"/>
-          <p:cNvSpPr/>
-          <p:nvPr/>
-        </p:nvSpPr>
-        <p:spPr>
-          <a:xfrm>
-            <a:off x="8937000" y="1368000"/>
-            <a:ext cx="2835000" cy="324000"/>
-          </a:xfrm>
-          <a:prstGeom prst="rect">
-            <a:avLst/>
-          </a:prstGeom>
-          <a:solidFill>
-            <a:srgbClr val="D9D9D9"/>
-          </a:solidFill>
-          <a:ln>
-            <a:solidFill>
-              <a:srgbClr val="BFBFBF"/>
-            </a:solidFill>
-          </a:ln>
-          <a:effectLst/>
-        </p:spPr>
-        <p:style>
-          <a:lnRef idx="1">
-            <a:schemeClr val="accent1"/>
-          </a:lnRef>
-          <a:fillRef idx="3">
-            <a:schemeClr val="accent1"/>
-          </a:fillRef>
-          <a:effectRef idx="2">
-            <a:schemeClr val="accent1"/>
-          </a:effectRef>
-          <a:fontRef idx="minor">
-            <a:schemeClr val="lt1"/>
-          </a:fontRef>
-        </p:style>
-        <p:txBody>
-          <a:bodyPr rtlCol="0" anchor="ctr"/>
-          <a:lstStyle/>
-          <a:p>
-            <a:pPr algn="ctr"/>
-            <a:endParaRPr/>
-          </a:p>
-        </p:txBody>
-      </p:sp>
-      <p:sp>
-        <p:nvSpPr>
-          <p:cNvPr id="15" name="Rectangle 15"/>
-          <p:cNvSpPr/>
-          <p:nvPr/>
-        </p:nvSpPr>
-        <p:spPr>
-          <a:xfrm>
-            <a:off x="8937000" y="1692000"/>
-            <a:ext cx="2835000" cy="4608000"/>
-          </a:xfrm>
-          <a:prstGeom prst="rect">
-            <a:avLst/>
-          </a:prstGeom>
-          <a:noFill/>
-          <a:ln>
-            <a:solidFill>
-              <a:srgbClr val="BFBFBF"/>
-            </a:solidFill>
-          </a:ln>
-          <a:effectLst/>
-        </p:spPr>
-        <p:style>
-          <a:lnRef idx="1">
-            <a:schemeClr val="accent1"/>
-          </a:lnRef>
-          <a:fillRef idx="3">
-            <a:schemeClr val="accent1"/>
-          </a:fillRef>
-          <a:effectRef idx="2">
-            <a:schemeClr val="accent1"/>
-          </a:effectRef>
-          <a:fontRef idx="minor">
-            <a:schemeClr val="lt1"/>
-          </a:fontRef>
-        </p:style>
-        <p:txBody>
-          <a:bodyPr rtlCol="0" anchor="ctr"/>
-          <a:lstStyle/>
-          <a:p>
-            <a:pPr algn="ctr"/>
-            <a:endParaRPr/>
-          </a:p>
-        </p:txBody>
-      </p:sp>
-      <p:sp>
-        <p:nvSpPr>
-          <p:cNvPr id="16" name="TextBox 16"/>
-          <p:cNvSpPr txBox="1"/>
-          <p:nvPr/>
-        </p:nvSpPr>
-        <p:spPr>
-          <a:xfrm>
-            <a:off x="8991000" y="1425600"/>
-            <a:ext cx="2727000" cy="216000"/>
-          </a:xfrm>
-          <a:prstGeom prst="rect">
-            <a:avLst/>
-          </a:prstGeom>
-          <a:noFill/>
-        </p:spPr>
-        <p:txBody>
-          <a:bodyPr wrap="square">
-            <a:spAutoFit/>
-          </a:bodyPr>
-          <a:lstStyle/>
-          <a:p>
-            <a:r>
-              <a:rPr sz="900" b="1">
-                <a:solidFill>
-                  <a:srgbClr val="1A1A1A"/>
-                </a:solidFill>
-                <a:latin typeface="맑은 고딕"/>
-                <a:ea typeface="맑은 고딕"/>
-              </a:rPr>
-              <a:t>알림과 변경</a:t>
-            </a:r>
-          </a:p>
-        </p:txBody>
-      </p:sp>
-      <p:sp>
-        <p:nvSpPr>
-          <p:cNvPr id="17" name="Terminator 17"/>
-          <p:cNvSpPr/>
-          <p:nvPr/>
-        </p:nvSpPr>
-        <p:spPr>
-          <a:xfrm>
-            <a:off x="1057500" y="1872000"/>
-            <a:ext cx="1296000" cy="288000"/>
-          </a:xfrm>
-          <a:prstGeom prst="flowChartTerminator">
-            <a:avLst/>
-          </a:prstGeom>
-          <a:solidFill>
-            <a:srgbClr val="D9D9D9"/>
-          </a:solidFill>
-          <a:ln w="11430">
-            <a:solidFill>
-              <a:srgbClr val="404040"/>
-            </a:solidFill>
-          </a:ln>
-          <a:effectLst/>
-        </p:spPr>
-        <p:style>
-          <a:lnRef idx="1">
-            <a:schemeClr val="accent1"/>
-          </a:lnRef>
-          <a:fillRef idx="3">
-            <a:schemeClr val="accent1"/>
-          </a:fillRef>
-          <a:effectRef idx="2">
-            <a:schemeClr val="accent1"/>
-          </a:effectRef>
-          <a:fontRef idx="minor">
-            <a:schemeClr val="lt1"/>
-          </a:fontRef>
-        </p:style>
-        <p:txBody>
-          <a:bodyPr wrap="square" lIns="28800" tIns="10800" rIns="28800" bIns="10800" rtlCol="0" anchor="ctr"/>
-          <a:lstStyle/>
-          <a:p>
-            <a:pPr algn="ctr"/>
-            <a:r>
-              <a:rPr sz="750">
-                <a:solidFill>
-                  <a:srgbClr val="1A1A1A"/>
-                </a:solidFill>
-                <a:latin typeface="맑은 고딕"/>
-                <a:ea typeface="맑은 고딕"/>
-              </a:rPr>
-              <a:t>Start</a:t>
-            </a:r>
-          </a:p>
-        </p:txBody>
-      </p:sp>
-      <p:sp>
-        <p:nvSpPr>
-          <p:cNvPr id="18" name="Document 18"/>
-          <p:cNvSpPr/>
-          <p:nvPr/>
-        </p:nvSpPr>
-        <p:spPr>
-          <a:xfrm>
-            <a:off x="1057500" y="2340000"/>
-            <a:ext cx="1296000" cy="288000"/>
-          </a:xfrm>
-          <a:prstGeom prst="flowChartDocument">
-            <a:avLst/>
-          </a:prstGeom>
-          <a:solidFill>
-            <a:srgbClr val="FFFFFF"/>
-          </a:solidFill>
-          <a:ln w="11430">
-            <a:solidFill>
-              <a:srgbClr val="404040"/>
-            </a:solidFill>
-          </a:ln>
-          <a:effectLst/>
-        </p:spPr>
-        <p:style>
-          <a:lnRef idx="1">
-            <a:schemeClr val="accent1"/>
-          </a:lnRef>
-          <a:fillRef idx="3">
-            <a:schemeClr val="accent1"/>
-          </a:fillRef>
-          <a:effectRef idx="2">
-            <a:schemeClr val="accent1"/>
-          </a:effectRef>
-          <a:fontRef idx="minor">
-            <a:schemeClr val="lt1"/>
-          </a:fontRef>
-        </p:style>
-        <p:txBody>
-          <a:bodyPr wrap="square" lIns="28800" tIns="10800" rIns="28800" bIns="10800" rtlCol="0" anchor="ctr"/>
-          <a:lstStyle/>
-          <a:p>
-            <a:pPr algn="ctr"/>
-            <a:r>
-              <a:rPr sz="750">
-                <a:solidFill>
-                  <a:srgbClr val="1A1A1A"/>
-                </a:solidFill>
-                <a:latin typeface="맑은 고딕"/>
-                <a:ea typeface="맑은 고딕"/>
-              </a:rPr>
-              <a:t>가능 시간 입력 (C-03, C-04)</a:t>
-            </a:r>
-          </a:p>
-        </p:txBody>
-      </p:sp>
-      <p:sp>
-        <p:nvSpPr>
-          <p:cNvPr id="19" name="Data 19"/>
-          <p:cNvSpPr/>
-          <p:nvPr/>
-        </p:nvSpPr>
-        <p:spPr>
-          <a:xfrm>
-            <a:off x="1057500" y="2808000"/>
-            <a:ext cx="1296000" cy="288000"/>
-          </a:xfrm>
-          <a:prstGeom prst="flowChartInputOutput">
-            <a:avLst/>
-          </a:prstGeom>
-          <a:solidFill>
-            <a:srgbClr val="FFFFFF"/>
-          </a:solidFill>
-          <a:ln w="11430">
-            <a:solidFill>
-              <a:srgbClr val="404040"/>
-            </a:solidFill>
-          </a:ln>
-          <a:effectLst/>
-        </p:spPr>
-        <p:style>
-          <a:lnRef idx="1">
-            <a:schemeClr val="accent1"/>
-          </a:lnRef>
-          <a:fillRef idx="3">
-            <a:schemeClr val="accent1"/>
-          </a:fillRef>
-          <a:effectRef idx="2">
-            <a:schemeClr val="accent1"/>
-          </a:effectRef>
-          <a:fontRef idx="minor">
-            <a:schemeClr val="lt1"/>
-          </a:fontRef>
-        </p:style>
-        <p:txBody>
-          <a:bodyPr wrap="square" lIns="28800" tIns="10800" rIns="28800" bIns="10800" rtlCol="0" anchor="ctr"/>
-          <a:lstStyle/>
-          <a:p>
-            <a:pPr algn="ctr"/>
-            <a:r>
-              <a:rPr sz="750">
-                <a:solidFill>
-                  <a:srgbClr val="1A1A1A"/>
-                </a:solidFill>
-                <a:latin typeface="맑은 고딕"/>
-                <a:ea typeface="맑은 고딕"/>
-              </a:rPr>
-              <a:t>날 상태, 시간대</a:t>
-            </a:r>
-          </a:p>
-        </p:txBody>
-      </p:sp>
-      <p:sp>
-        <p:nvSpPr>
-          <p:cNvPr id="20" name="TextBox 20"/>
-          <p:cNvSpPr txBox="1"/>
-          <p:nvPr/>
-        </p:nvSpPr>
-        <p:spPr>
-          <a:xfrm>
-            <a:off x="2389500" y="2790000"/>
-            <a:ext cx="841500" cy="360000"/>
-          </a:xfrm>
-          <a:prstGeom prst="rect">
-            <a:avLst/>
-          </a:prstGeom>
-          <a:noFill/>
-        </p:spPr>
-        <p:txBody>
-          <a:bodyPr wrap="square">
-            <a:spAutoFit/>
-          </a:bodyPr>
-          <a:lstStyle/>
-          <a:p>
-            <a:r>
-              <a:rPr sz="650" b="0">
-                <a:solidFill>
-                  <a:srgbClr val="595959"/>
-                </a:solidFill>
-                <a:latin typeface="맑은 고딕"/>
-                <a:ea typeface="맑은 고딕"/>
-              </a:rPr>
-              <a:t>· 날마다 되는 날, 안 됨, 바뀔 수도</a:t>
-            </a:r>
-          </a:p>
-          <a:p>
-            <a:r>
-              <a:rPr sz="650" b="0">
-                <a:solidFill>
-                  <a:srgbClr val="595959"/>
-                </a:solidFill>
-                <a:latin typeface="맑은 고딕"/>
-                <a:ea typeface="맑은 고딕"/>
-              </a:rPr>
-              <a:t>· 시작, 끝 (30분 단위)</a:t>
-            </a:r>
-          </a:p>
-        </p:txBody>
-      </p:sp>
-      <p:sp>
-        <p:nvSpPr>
-          <p:cNvPr id="21" name="Decision 21"/>
-          <p:cNvSpPr/>
-          <p:nvPr/>
-        </p:nvSpPr>
-        <p:spPr>
-          <a:xfrm>
-            <a:off x="985500" y="3276000"/>
-            <a:ext cx="1440000" cy="396000"/>
-          </a:xfrm>
-          <a:prstGeom prst="flowChartDecision">
-            <a:avLst/>
-          </a:prstGeom>
-          <a:solidFill>
-            <a:srgbClr val="EDEDED"/>
-          </a:solidFill>
-          <a:ln w="11430">
-            <a:solidFill>
-              <a:srgbClr val="404040"/>
-            </a:solidFill>
-          </a:ln>
-          <a:effectLst/>
-        </p:spPr>
-        <p:style>
-          <a:lnRef idx="1">
-            <a:schemeClr val="accent1"/>
-          </a:lnRef>
-          <a:fillRef idx="3">
-            <a:schemeClr val="accent1"/>
-          </a:fillRef>
-          <a:effectRef idx="2">
-            <a:schemeClr val="accent1"/>
-          </a:effectRef>
-          <a:fontRef idx="minor">
-            <a:schemeClr val="lt1"/>
-          </a:fontRef>
-        </p:style>
-        <p:txBody>
-          <a:bodyPr wrap="square" lIns="28800" tIns="10800" rIns="28800" bIns="10800" rtlCol="0" anchor="ctr"/>
-          <a:lstStyle/>
-          <a:p>
-            <a:pPr algn="ctr"/>
-            <a:r>
-              <a:rPr sz="750">
-                <a:solidFill>
-                  <a:srgbClr val="1A1A1A"/>
-                </a:solidFill>
-                <a:latin typeface="맑은 고딕"/>
-                <a:ea typeface="맑은 고딕"/>
-              </a:rPr>
-              <a:t>되는 날 있음?</a:t>
-            </a:r>
-          </a:p>
-        </p:txBody>
-      </p:sp>
-      <p:sp>
-        <p:nvSpPr>
-          <p:cNvPr id="22" name="Magnetic Disk 22"/>
-          <p:cNvSpPr/>
-          <p:nvPr/>
-        </p:nvSpPr>
-        <p:spPr>
-          <a:xfrm>
-            <a:off x="1057500" y="3852000"/>
-            <a:ext cx="1296000" cy="288000"/>
-          </a:xfrm>
-          <a:prstGeom prst="flowChartMagneticDisk">
-            <a:avLst/>
-          </a:prstGeom>
-          <a:solidFill>
-            <a:srgbClr val="F2F2F2"/>
-          </a:solidFill>
-          <a:ln w="11430">
-            <a:solidFill>
-              <a:srgbClr val="404040"/>
-            </a:solidFill>
-          </a:ln>
-          <a:effectLst/>
-        </p:spPr>
-        <p:style>
-          <a:lnRef idx="1">
-            <a:schemeClr val="accent1"/>
-          </a:lnRef>
-          <a:fillRef idx="3">
-            <a:schemeClr val="accent1"/>
-          </a:fillRef>
-          <a:effectRef idx="2">
-            <a:schemeClr val="accent1"/>
-          </a:effectRef>
-          <a:fontRef idx="minor">
-            <a:schemeClr val="lt1"/>
-          </a:fontRef>
-        </p:style>
-        <p:txBody>
-          <a:bodyPr wrap="square" lIns="28800" tIns="10800" rIns="28800" bIns="10800" rtlCol="0" anchor="ctr"/>
-          <a:lstStyle/>
-          <a:p>
-            <a:pPr algn="ctr"/>
-            <a:r>
-              <a:rPr sz="750">
-                <a:solidFill>
-                  <a:srgbClr val="1A1A1A"/>
-                </a:solidFill>
-                <a:latin typeface="맑은 고딕"/>
-                <a:ea typeface="맑은 고딕"/>
-              </a:rPr>
-              <a:t>가능시간 DB</a:t>
-            </a:r>
-          </a:p>
-        </p:txBody>
-      </p:sp>
-      <p:cxnSp>
-        <p:nvCxnSpPr>
-          <p:cNvPr id="23" name="Connector 23"/>
-          <p:cNvCxnSpPr/>
-          <p:nvPr/>
-        </p:nvCxnSpPr>
-        <p:spPr>
-          <a:xfrm>
-            <a:off x="1705500" y="2160000"/>
-            <a:ext cx="0" cy="180000"/>
-          </a:xfrm>
-          <a:prstGeom prst="line">
-            <a:avLst/>
-          </a:prstGeom>
-          <a:ln w="11430">
-            <a:solidFill>
-              <a:srgbClr val="404040"/>
-            </a:solidFill>
-            <a:tailEnd type="triangle" w="sm" len="sm"/>
-          </a:ln>
-        </p:spPr>
-        <p:style>
-          <a:lnRef idx="2">
-            <a:schemeClr val="accent1"/>
-          </a:lnRef>
-          <a:fillRef idx="0">
-            <a:schemeClr val="accent1"/>
-          </a:fillRef>
-          <a:effectRef idx="1">
-            <a:schemeClr val="accent1"/>
-          </a:effectRef>
-          <a:fontRef idx="minor">
-            <a:schemeClr val="tx1"/>
-          </a:fontRef>
-        </p:style>
-      </p:cxnSp>
-      <p:cxnSp>
-        <p:nvCxnSpPr>
-          <p:cNvPr id="24" name="Connector 24"/>
-          <p:cNvCxnSpPr/>
-          <p:nvPr/>
-        </p:nvCxnSpPr>
-        <p:spPr>
-          <a:xfrm>
-            <a:off x="1705500" y="2628000"/>
-            <a:ext cx="0" cy="180000"/>
-          </a:xfrm>
-          <a:prstGeom prst="line">
-            <a:avLst/>
-          </a:prstGeom>
-          <a:ln w="11430">
-            <a:solidFill>
-              <a:srgbClr val="404040"/>
-            </a:solidFill>
-            <a:tailEnd type="triangle" w="sm" len="sm"/>
-          </a:ln>
-        </p:spPr>
-        <p:style>
-          <a:lnRef idx="2">
-            <a:schemeClr val="accent1"/>
-          </a:lnRef>
-          <a:fillRef idx="0">
-            <a:schemeClr val="accent1"/>
-          </a:fillRef>
-          <a:effectRef idx="1">
-            <a:schemeClr val="accent1"/>
-          </a:effectRef>
-          <a:fontRef idx="minor">
-            <a:schemeClr val="tx1"/>
-          </a:fontRef>
-        </p:style>
-      </p:cxnSp>
-      <p:cxnSp>
-        <p:nvCxnSpPr>
-          <p:cNvPr id="25" name="Connector 25"/>
-          <p:cNvCxnSpPr/>
-          <p:nvPr/>
-        </p:nvCxnSpPr>
-        <p:spPr>
-          <a:xfrm>
-            <a:off x="1705500" y="3096000"/>
-            <a:ext cx="0" cy="180000"/>
-          </a:xfrm>
-          <a:prstGeom prst="line">
-            <a:avLst/>
-          </a:prstGeom>
-          <a:ln w="11430">
-            <a:solidFill>
-              <a:srgbClr val="404040"/>
-            </a:solidFill>
-            <a:tailEnd type="triangle" w="sm" len="sm"/>
-          </a:ln>
-        </p:spPr>
-        <p:style>
-          <a:lnRef idx="2">
-            <a:schemeClr val="accent1"/>
-          </a:lnRef>
-          <a:fillRef idx="0">
-            <a:schemeClr val="accent1"/>
-          </a:fillRef>
-          <a:effectRef idx="1">
-            <a:schemeClr val="accent1"/>
-          </a:effectRef>
-          <a:fontRef idx="minor">
-            <a:schemeClr val="tx1"/>
-          </a:fontRef>
-        </p:style>
-      </p:cxnSp>
-      <p:cxnSp>
-        <p:nvCxnSpPr>
-          <p:cNvPr id="26" name="Connector 26"/>
-          <p:cNvCxnSpPr/>
-          <p:nvPr/>
-        </p:nvCxnSpPr>
-        <p:spPr>
-          <a:xfrm>
-            <a:off x="1705500" y="3672000"/>
-            <a:ext cx="0" cy="180000"/>
-          </a:xfrm>
-          <a:prstGeom prst="line">
-            <a:avLst/>
-          </a:prstGeom>
-          <a:ln w="11430">
-            <a:solidFill>
-              <a:srgbClr val="404040"/>
-            </a:solidFill>
-            <a:tailEnd type="triangle" w="sm" len="sm"/>
-          </a:ln>
-        </p:spPr>
-        <p:style>
-          <a:lnRef idx="2">
-            <a:schemeClr val="accent1"/>
-          </a:lnRef>
-          <a:fillRef idx="0">
-            <a:schemeClr val="accent1"/>
-          </a:fillRef>
-          <a:effectRef idx="1">
-            <a:schemeClr val="accent1"/>
-          </a:effectRef>
-          <a:fontRef idx="minor">
-            <a:schemeClr val="tx1"/>
-          </a:fontRef>
-        </p:style>
-      </p:cxnSp>
-      <p:sp>
-        <p:nvSpPr>
-          <p:cNvPr id="27" name="TextBox 27"/>
-          <p:cNvSpPr txBox="1"/>
-          <p:nvPr/>
-        </p:nvSpPr>
-        <p:spPr>
-          <a:xfrm>
-            <a:off x="1723500" y="3643200"/>
-            <a:ext cx="360000" cy="144000"/>
-          </a:xfrm>
-          <a:prstGeom prst="rect">
-            <a:avLst/>
-          </a:prstGeom>
-          <a:noFill/>
-        </p:spPr>
-        <p:txBody>
-          <a:bodyPr wrap="square">
-            <a:spAutoFit/>
-          </a:bodyPr>
-          <a:lstStyle/>
-          <a:p>
-            <a:r>
-              <a:rPr sz="650" b="1">
-                <a:solidFill>
-                  <a:srgbClr val="333333"/>
-                </a:solidFill>
-                <a:latin typeface="맑은 고딕"/>
-                <a:ea typeface="맑은 고딕"/>
-              </a:rPr>
-              <a:t>YES</a:t>
-            </a:r>
-          </a:p>
-        </p:txBody>
-      </p:sp>
-      <p:cxnSp>
-        <p:nvCxnSpPr>
-          <p:cNvPr id="28" name="Connector 28"/>
-          <p:cNvCxnSpPr/>
-          <p:nvPr/>
-        </p:nvCxnSpPr>
-        <p:spPr>
-          <a:xfrm>
-            <a:off x="2425500" y="3474000"/>
-            <a:ext cx="108000" cy="0"/>
-          </a:xfrm>
-          <a:prstGeom prst="line">
-            <a:avLst/>
-          </a:prstGeom>
-          <a:ln w="11430">
-            <a:solidFill>
-              <a:srgbClr val="404040"/>
-            </a:solidFill>
-          </a:ln>
-        </p:spPr>
-        <p:style>
-          <a:lnRef idx="2">
-            <a:schemeClr val="accent1"/>
-          </a:lnRef>
-          <a:fillRef idx="0">
-            <a:schemeClr val="accent1"/>
-          </a:fillRef>
-          <a:effectRef idx="1">
-            <a:schemeClr val="accent1"/>
-          </a:effectRef>
-          <a:fontRef idx="minor">
-            <a:schemeClr val="tx1"/>
-          </a:fontRef>
-        </p:style>
-      </p:cxnSp>
-      <p:cxnSp>
-        <p:nvCxnSpPr>
-          <p:cNvPr id="29" name="Connector 29"/>
-          <p:cNvCxnSpPr/>
-          <p:nvPr/>
-        </p:nvCxnSpPr>
-        <p:spPr>
-          <a:xfrm flipV="1">
-            <a:off x="2533500" y="2484000"/>
-            <a:ext cx="0" cy="990000"/>
-          </a:xfrm>
-          <a:prstGeom prst="line">
-            <a:avLst/>
-          </a:prstGeom>
-          <a:ln w="11430">
-            <a:solidFill>
-              <a:srgbClr val="404040"/>
-            </a:solidFill>
-          </a:ln>
-        </p:spPr>
-        <p:style>
-          <a:lnRef idx="2">
-            <a:schemeClr val="accent1"/>
-          </a:lnRef>
-          <a:fillRef idx="0">
-            <a:schemeClr val="accent1"/>
-          </a:fillRef>
-          <a:effectRef idx="1">
-            <a:schemeClr val="accent1"/>
-          </a:effectRef>
-          <a:fontRef idx="minor">
-            <a:schemeClr val="tx1"/>
-          </a:fontRef>
-        </p:style>
-      </p:cxnSp>
-      <p:cxnSp>
-        <p:nvCxnSpPr>
-          <p:cNvPr id="30" name="Connector 30"/>
-          <p:cNvCxnSpPr/>
-          <p:nvPr/>
-        </p:nvCxnSpPr>
-        <p:spPr>
-          <a:xfrm flipH="1">
-            <a:off x="2353500" y="2484000"/>
-            <a:ext cx="180000" cy="0"/>
-          </a:xfrm>
-          <a:prstGeom prst="line">
-            <a:avLst/>
-          </a:prstGeom>
-          <a:ln w="11430">
-            <a:solidFill>
-              <a:srgbClr val="404040"/>
-            </a:solidFill>
-            <a:tailEnd type="triangle" w="sm" len="sm"/>
-          </a:ln>
-        </p:spPr>
-        <p:style>
-          <a:lnRef idx="2">
-            <a:schemeClr val="accent1"/>
-          </a:lnRef>
-          <a:fillRef idx="0">
-            <a:schemeClr val="accent1"/>
-          </a:fillRef>
-          <a:effectRef idx="1">
-            <a:schemeClr val="accent1"/>
-          </a:effectRef>
-          <a:fontRef idx="minor">
-            <a:schemeClr val="tx1"/>
-          </a:fontRef>
-        </p:style>
-      </p:cxnSp>
-      <p:sp>
-        <p:nvSpPr>
-          <p:cNvPr id="31" name="TextBox 31"/>
-          <p:cNvSpPr txBox="1"/>
-          <p:nvPr/>
-        </p:nvSpPr>
-        <p:spPr>
-          <a:xfrm>
-            <a:off x="2407500" y="3312000"/>
-            <a:ext cx="360000" cy="144000"/>
-          </a:xfrm>
-          <a:prstGeom prst="rect">
-            <a:avLst/>
-          </a:prstGeom>
-          <a:noFill/>
-        </p:spPr>
-        <p:txBody>
-          <a:bodyPr wrap="square">
-            <a:spAutoFit/>
-          </a:bodyPr>
-          <a:lstStyle/>
-          <a:p>
-            <a:r>
-              <a:rPr sz="650" b="1">
-                <a:solidFill>
-                  <a:srgbClr val="333333"/>
-                </a:solidFill>
-                <a:latin typeface="맑은 고딕"/>
-                <a:ea typeface="맑은 고딕"/>
-              </a:rPr>
-              <a:t>NO</a:t>
-            </a:r>
-          </a:p>
-        </p:txBody>
-      </p:sp>
-      <p:sp>
-        <p:nvSpPr>
-          <p:cNvPr id="32" name="Decision 32"/>
-          <p:cNvSpPr/>
-          <p:nvPr/>
-        </p:nvSpPr>
-        <p:spPr>
-          <a:xfrm>
-            <a:off x="3820500" y="1872000"/>
-            <a:ext cx="1440000" cy="396000"/>
-          </a:xfrm>
-          <a:prstGeom prst="flowChartDecision">
-            <a:avLst/>
-          </a:prstGeom>
-          <a:solidFill>
-            <a:srgbClr val="EDEDED"/>
-          </a:solidFill>
-          <a:ln w="11430">
-            <a:solidFill>
-              <a:srgbClr val="404040"/>
-            </a:solidFill>
-          </a:ln>
-          <a:effectLst/>
-        </p:spPr>
-        <p:style>
-          <a:lnRef idx="1">
-            <a:schemeClr val="accent1"/>
-          </a:lnRef>
-          <a:fillRef idx="3">
-            <a:schemeClr val="accent1"/>
-          </a:fillRef>
-          <a:effectRef idx="2">
-            <a:schemeClr val="accent1"/>
-          </a:effectRef>
-          <a:fontRef idx="minor">
-            <a:schemeClr val="lt1"/>
-          </a:fontRef>
-        </p:style>
-        <p:txBody>
-          <a:bodyPr wrap="square" lIns="28800" tIns="10800" rIns="28800" bIns="10800" rtlCol="0" anchor="ctr"/>
-          <a:lstStyle/>
-          <a:p>
-            <a:pPr algn="ctr"/>
-            <a:r>
-              <a:rPr sz="750">
-                <a:solidFill>
-                  <a:srgbClr val="1A1A1A"/>
-                </a:solidFill>
-                <a:latin typeface="맑은 고딕"/>
-                <a:ea typeface="맑은 고딕"/>
-              </a:rPr>
-              <a:t>전원 제출?</a:t>
-            </a:r>
-          </a:p>
-        </p:txBody>
-      </p:sp>
-      <p:sp>
-        <p:nvSpPr>
-          <p:cNvPr id="33" name="Process 33"/>
-          <p:cNvSpPr/>
-          <p:nvPr/>
-        </p:nvSpPr>
-        <p:spPr>
-          <a:xfrm>
-            <a:off x="3892500" y="2448000"/>
-            <a:ext cx="1296000" cy="288000"/>
-          </a:xfrm>
-          <a:prstGeom prst="flowChartProcess">
-            <a:avLst/>
-          </a:prstGeom>
-          <a:solidFill>
-            <a:srgbClr val="FFFFFF"/>
-          </a:solidFill>
-          <a:ln w="11430">
-            <a:solidFill>
-              <a:srgbClr val="404040"/>
-            </a:solidFill>
-          </a:ln>
-          <a:effectLst/>
-        </p:spPr>
-        <p:style>
-          <a:lnRef idx="1">
-            <a:schemeClr val="accent1"/>
-          </a:lnRef>
-          <a:fillRef idx="3">
-            <a:schemeClr val="accent1"/>
-          </a:fillRef>
-          <a:effectRef idx="2">
-            <a:schemeClr val="accent1"/>
-          </a:effectRef>
-          <a:fontRef idx="minor">
-            <a:schemeClr val="lt1"/>
-          </a:fontRef>
-        </p:style>
-        <p:txBody>
-          <a:bodyPr wrap="square" lIns="28800" tIns="10800" rIns="28800" bIns="10800" rtlCol="0" anchor="ctr"/>
-          <a:lstStyle/>
-          <a:p>
-            <a:pPr algn="ctr"/>
-            <a:r>
-              <a:rPr sz="750">
-                <a:solidFill>
-                  <a:srgbClr val="1A1A1A"/>
-                </a:solidFill>
-                <a:latin typeface="맑은 고딕"/>
-                <a:ea typeface="맑은 고딕"/>
-              </a:rPr>
-              <a:t>날마다 전원 시간대의 교집합</a:t>
-            </a:r>
-          </a:p>
-        </p:txBody>
-      </p:sp>
-      <p:sp>
-        <p:nvSpPr>
-          <p:cNvPr id="34" name="Decision 34"/>
-          <p:cNvSpPr/>
-          <p:nvPr/>
-        </p:nvSpPr>
-        <p:spPr>
-          <a:xfrm>
-            <a:off x="3820500" y="2916000"/>
-            <a:ext cx="1440000" cy="396000"/>
-          </a:xfrm>
-          <a:prstGeom prst="flowChartDecision">
-            <a:avLst/>
-          </a:prstGeom>
-          <a:solidFill>
-            <a:srgbClr val="EDEDED"/>
-          </a:solidFill>
-          <a:ln w="11430">
-            <a:solidFill>
-              <a:srgbClr val="404040"/>
-            </a:solidFill>
-          </a:ln>
-          <a:effectLst/>
-        </p:spPr>
-        <p:style>
-          <a:lnRef idx="1">
-            <a:schemeClr val="accent1"/>
-          </a:lnRef>
-          <a:fillRef idx="3">
-            <a:schemeClr val="accent1"/>
-          </a:fillRef>
-          <a:effectRef idx="2">
-            <a:schemeClr val="accent1"/>
-          </a:effectRef>
-          <a:fontRef idx="minor">
-            <a:schemeClr val="lt1"/>
-          </a:fontRef>
-        </p:style>
-        <p:txBody>
-          <a:bodyPr wrap="square" lIns="28800" tIns="10800" rIns="28800" bIns="10800" rtlCol="0" anchor="ctr"/>
-          <a:lstStyle/>
-          <a:p>
-            <a:pPr algn="ctr"/>
-            <a:r>
-              <a:rPr sz="750">
-                <a:solidFill>
-                  <a:srgbClr val="1A1A1A"/>
-                </a:solidFill>
-                <a:latin typeface="맑은 고딕"/>
-                <a:ea typeface="맑은 고딕"/>
-              </a:rPr>
-              <a:t>교집합 ≥ 진행 예상 시간?</a:t>
-            </a:r>
-          </a:p>
-        </p:txBody>
-      </p:sp>
-      <p:sp>
-        <p:nvSpPr>
-          <p:cNvPr id="35" name="TextBox 35"/>
-          <p:cNvSpPr txBox="1"/>
-          <p:nvPr/>
-        </p:nvSpPr>
-        <p:spPr>
-          <a:xfrm>
-            <a:off x="5296500" y="2898000"/>
-            <a:ext cx="769500" cy="468000"/>
-          </a:xfrm>
-          <a:prstGeom prst="rect">
-            <a:avLst/>
-          </a:prstGeom>
-          <a:noFill/>
-        </p:spPr>
-        <p:txBody>
-          <a:bodyPr wrap="square">
-            <a:spAutoFit/>
-          </a:bodyPr>
-          <a:lstStyle/>
-          <a:p>
-            <a:r>
-              <a:rPr sz="650" b="0">
-                <a:solidFill>
-                  <a:srgbClr val="595959"/>
-                </a:solidFill>
-                <a:latin typeface="맑은 고딕"/>
-                <a:ea typeface="맑은 고딕"/>
-              </a:rPr>
-              <a:t>· 진행 예상 시간은 팀장이 정함</a:t>
-            </a:r>
-          </a:p>
-          <a:p>
-            <a:r>
-              <a:rPr sz="650" b="0">
-                <a:solidFill>
-                  <a:srgbClr val="595959"/>
-                </a:solidFill>
-                <a:latin typeface="맑은 고딕"/>
-                <a:ea typeface="맑은 고딕"/>
-              </a:rPr>
-              <a:t>· 모자라면 후보에서 뺀다</a:t>
-            </a:r>
-          </a:p>
-        </p:txBody>
-      </p:sp>
-      <p:sp>
-        <p:nvSpPr>
-          <p:cNvPr id="36" name="Process 36"/>
-          <p:cNvSpPr/>
-          <p:nvPr/>
-        </p:nvSpPr>
-        <p:spPr>
-          <a:xfrm>
-            <a:off x="3892500" y="3492000"/>
-            <a:ext cx="1296000" cy="288000"/>
-          </a:xfrm>
-          <a:prstGeom prst="flowChartProcess">
-            <a:avLst/>
-          </a:prstGeom>
-          <a:solidFill>
-            <a:srgbClr val="FFFFFF"/>
-          </a:solidFill>
-          <a:ln w="11430">
-            <a:solidFill>
-              <a:srgbClr val="404040"/>
-            </a:solidFill>
-          </a:ln>
-          <a:effectLst/>
-        </p:spPr>
-        <p:style>
-          <a:lnRef idx="1">
-            <a:schemeClr val="accent1"/>
-          </a:lnRef>
-          <a:fillRef idx="3">
-            <a:schemeClr val="accent1"/>
-          </a:fillRef>
-          <a:effectRef idx="2">
-            <a:schemeClr val="accent1"/>
-          </a:effectRef>
-          <a:fontRef idx="minor">
-            <a:schemeClr val="lt1"/>
-          </a:fontRef>
-        </p:style>
-        <p:txBody>
-          <a:bodyPr wrap="square" lIns="28800" tIns="10800" rIns="28800" bIns="10800" rtlCol="0" anchor="ctr"/>
-          <a:lstStyle/>
-          <a:p>
-            <a:pPr algn="ctr"/>
-            <a:r>
-              <a:rPr sz="750">
-                <a:solidFill>
-                  <a:srgbClr val="1A1A1A"/>
-                </a:solidFill>
-                <a:latin typeface="맑은 고딕"/>
-                <a:ea typeface="맑은 고딕"/>
-              </a:rPr>
-              <a:t>후보로 저장</a:t>
-            </a:r>
-          </a:p>
-        </p:txBody>
-      </p:sp>
-      <p:sp>
-        <p:nvSpPr>
-          <p:cNvPr id="37" name="TextBox 37"/>
-          <p:cNvSpPr txBox="1"/>
-          <p:nvPr/>
-        </p:nvSpPr>
-        <p:spPr>
-          <a:xfrm>
-            <a:off x="5224500" y="3474000"/>
-            <a:ext cx="841500" cy="360000"/>
-          </a:xfrm>
-          <a:prstGeom prst="rect">
-            <a:avLst/>
-          </a:prstGeom>
-          <a:noFill/>
-        </p:spPr>
-        <p:txBody>
-          <a:bodyPr wrap="square">
-            <a:spAutoFit/>
-          </a:bodyPr>
-          <a:lstStyle/>
-          <a:p>
-            <a:r>
-              <a:rPr sz="650" b="0">
-                <a:solidFill>
-                  <a:srgbClr val="595959"/>
-                </a:solidFill>
-                <a:latin typeface="맑은 고딕"/>
-                <a:ea typeface="맑은 고딕"/>
-              </a:rPr>
-              <a:t>· 바뀔 수도 있는 날이 끼면 2순위</a:t>
-            </a:r>
-          </a:p>
-          <a:p>
-            <a:r>
-              <a:rPr sz="650" b="0">
-                <a:solidFill>
-                  <a:srgbClr val="595959"/>
-                </a:solidFill>
-                <a:latin typeface="맑은 고딕"/>
-                <a:ea typeface="맑은 고딕"/>
-              </a:rPr>
-              <a:t>· 1순위 먼저, 같으면 날짜순</a:t>
-            </a:r>
-          </a:p>
-        </p:txBody>
-      </p:sp>
-      <p:sp>
-        <p:nvSpPr>
-          <p:cNvPr id="38" name="Process 38"/>
-          <p:cNvSpPr/>
-          <p:nvPr/>
-        </p:nvSpPr>
-        <p:spPr>
-          <a:xfrm>
-            <a:off x="3892500" y="3960000"/>
-            <a:ext cx="1296000" cy="288000"/>
-          </a:xfrm>
-          <a:prstGeom prst="flowChartProcess">
-            <a:avLst/>
-          </a:prstGeom>
-          <a:solidFill>
-            <a:srgbClr val="FFFFFF"/>
-          </a:solidFill>
-          <a:ln w="11430">
-            <a:solidFill>
-              <a:srgbClr val="404040"/>
-            </a:solidFill>
-          </a:ln>
-          <a:effectLst/>
-        </p:spPr>
-        <p:style>
-          <a:lnRef idx="1">
-            <a:schemeClr val="accent1"/>
-          </a:lnRef>
-          <a:fillRef idx="3">
-            <a:schemeClr val="accent1"/>
-          </a:fillRef>
-          <a:effectRef idx="2">
-            <a:schemeClr val="accent1"/>
-          </a:effectRef>
-          <a:fontRef idx="minor">
-            <a:schemeClr val="lt1"/>
-          </a:fontRef>
-        </p:style>
-        <p:txBody>
-          <a:bodyPr wrap="square" lIns="28800" tIns="10800" rIns="28800" bIns="10800" rtlCol="0" anchor="ctr"/>
-          <a:lstStyle/>
-          <a:p>
-            <a:pPr algn="ctr"/>
-            <a:r>
-              <a:rPr sz="750">
-                <a:solidFill>
-                  <a:srgbClr val="1A1A1A"/>
-                </a:solidFill>
-                <a:latin typeface="맑은 고딕"/>
-                <a:ea typeface="맑은 고딕"/>
-              </a:rPr>
-              <a:t>마감까지 대기</a:t>
-            </a:r>
-          </a:p>
-        </p:txBody>
-      </p:sp>
-      <p:sp>
-        <p:nvSpPr>
-          <p:cNvPr id="39" name="Process 39"/>
-          <p:cNvSpPr/>
-          <p:nvPr/>
-        </p:nvSpPr>
-        <p:spPr>
-          <a:xfrm>
-            <a:off x="3892500" y="4428000"/>
-            <a:ext cx="1296000" cy="288000"/>
-          </a:xfrm>
-          <a:prstGeom prst="flowChartProcess">
-            <a:avLst/>
-          </a:prstGeom>
-          <a:solidFill>
-            <a:srgbClr val="FFFFFF"/>
-          </a:solidFill>
-          <a:ln w="11430">
-            <a:solidFill>
-              <a:srgbClr val="404040"/>
-            </a:solidFill>
-          </a:ln>
-          <a:effectLst/>
-        </p:spPr>
-        <p:style>
-          <a:lnRef idx="1">
-            <a:schemeClr val="accent1"/>
-          </a:lnRef>
-          <a:fillRef idx="3">
-            <a:schemeClr val="accent1"/>
-          </a:fillRef>
-          <a:effectRef idx="2">
-            <a:schemeClr val="accent1"/>
-          </a:effectRef>
-          <a:fontRef idx="minor">
-            <a:schemeClr val="lt1"/>
-          </a:fontRef>
-        </p:style>
-        <p:txBody>
-          <a:bodyPr wrap="square" lIns="28800" tIns="10800" rIns="28800" bIns="10800" rtlCol="0" anchor="ctr"/>
-          <a:lstStyle/>
-          <a:p>
-            <a:pPr algn="ctr"/>
-            <a:r>
-              <a:rPr sz="750">
-                <a:solidFill>
-                  <a:srgbClr val="1A1A1A"/>
-                </a:solidFill>
-                <a:latin typeface="맑은 고딕"/>
-                <a:ea typeface="맑은 고딕"/>
-              </a:rPr>
-              <a:t>그 날은 뺀다</a:t>
-            </a:r>
-          </a:p>
-        </p:txBody>
-      </p:sp>
-      <p:cxnSp>
-        <p:nvCxnSpPr>
-          <p:cNvPr id="40" name="Connector 40"/>
-          <p:cNvCxnSpPr/>
-          <p:nvPr/>
-        </p:nvCxnSpPr>
-        <p:spPr>
-          <a:xfrm>
-            <a:off x="4540500" y="2268000"/>
-            <a:ext cx="0" cy="180000"/>
-          </a:xfrm>
-          <a:prstGeom prst="line">
-            <a:avLst/>
-          </a:prstGeom>
-          <a:ln w="11430">
-            <a:solidFill>
-              <a:srgbClr val="404040"/>
-            </a:solidFill>
-            <a:tailEnd type="triangle" w="sm" len="sm"/>
-          </a:ln>
-        </p:spPr>
-        <p:style>
-          <a:lnRef idx="2">
-            <a:schemeClr val="accent1"/>
-          </a:lnRef>
-          <a:fillRef idx="0">
-            <a:schemeClr val="accent1"/>
-          </a:fillRef>
-          <a:effectRef idx="1">
-            <a:schemeClr val="accent1"/>
-          </a:effectRef>
-          <a:fontRef idx="minor">
-            <a:schemeClr val="tx1"/>
-          </a:fontRef>
-        </p:style>
-      </p:cxnSp>
-      <p:sp>
-        <p:nvSpPr>
-          <p:cNvPr id="41" name="TextBox 41"/>
-          <p:cNvSpPr txBox="1"/>
-          <p:nvPr/>
-        </p:nvSpPr>
-        <p:spPr>
-          <a:xfrm>
-            <a:off x="4558500" y="2239200"/>
-            <a:ext cx="360000" cy="144000"/>
-          </a:xfrm>
-          <a:prstGeom prst="rect">
-            <a:avLst/>
-          </a:prstGeom>
-          <a:noFill/>
-        </p:spPr>
-        <p:txBody>
-          <a:bodyPr wrap="square">
-            <a:spAutoFit/>
-          </a:bodyPr>
-          <a:lstStyle/>
-          <a:p>
-            <a:r>
-              <a:rPr sz="650" b="1">
-                <a:solidFill>
-                  <a:srgbClr val="333333"/>
-                </a:solidFill>
-                <a:latin typeface="맑은 고딕"/>
-                <a:ea typeface="맑은 고딕"/>
-              </a:rPr>
-              <a:t>YES</a:t>
-            </a:r>
-          </a:p>
-        </p:txBody>
-      </p:sp>
-      <p:cxnSp>
-        <p:nvCxnSpPr>
-          <p:cNvPr id="42" name="Connector 42"/>
-          <p:cNvCxnSpPr/>
-          <p:nvPr/>
-        </p:nvCxnSpPr>
-        <p:spPr>
-          <a:xfrm>
-            <a:off x="5260500" y="2070000"/>
-            <a:ext cx="108000" cy="0"/>
-          </a:xfrm>
-          <a:prstGeom prst="line">
-            <a:avLst/>
-          </a:prstGeom>
-          <a:ln w="11430">
-            <a:solidFill>
-              <a:srgbClr val="404040"/>
-            </a:solidFill>
-          </a:ln>
-        </p:spPr>
-        <p:style>
-          <a:lnRef idx="2">
-            <a:schemeClr val="accent1"/>
-          </a:lnRef>
-          <a:fillRef idx="0">
-            <a:schemeClr val="accent1"/>
-          </a:fillRef>
-          <a:effectRef idx="1">
-            <a:schemeClr val="accent1"/>
-          </a:effectRef>
-          <a:fontRef idx="minor">
-            <a:schemeClr val="tx1"/>
-          </a:fontRef>
-        </p:style>
-      </p:cxnSp>
-      <p:cxnSp>
-        <p:nvCxnSpPr>
-          <p:cNvPr id="43" name="Connector 43"/>
-          <p:cNvCxnSpPr/>
-          <p:nvPr/>
-        </p:nvCxnSpPr>
-        <p:spPr>
-          <a:xfrm>
-            <a:off x="5368500" y="2070000"/>
-            <a:ext cx="0" cy="2034000"/>
-          </a:xfrm>
-          <a:prstGeom prst="line">
-            <a:avLst/>
-          </a:prstGeom>
-          <a:ln w="11430">
-            <a:solidFill>
-              <a:srgbClr val="404040"/>
-            </a:solidFill>
-          </a:ln>
-        </p:spPr>
-        <p:style>
-          <a:lnRef idx="2">
-            <a:schemeClr val="accent1"/>
-          </a:lnRef>
-          <a:fillRef idx="0">
-            <a:schemeClr val="accent1"/>
-          </a:fillRef>
-          <a:effectRef idx="1">
-            <a:schemeClr val="accent1"/>
-          </a:effectRef>
-          <a:fontRef idx="minor">
-            <a:schemeClr val="tx1"/>
-          </a:fontRef>
-        </p:style>
-      </p:cxnSp>
-      <p:cxnSp>
-        <p:nvCxnSpPr>
-          <p:cNvPr id="44" name="Connector 44"/>
-          <p:cNvCxnSpPr/>
-          <p:nvPr/>
-        </p:nvCxnSpPr>
-        <p:spPr>
-          <a:xfrm flipH="1">
-            <a:off x="5188500" y="4104000"/>
-            <a:ext cx="180000" cy="0"/>
-          </a:xfrm>
-          <a:prstGeom prst="line">
-            <a:avLst/>
-          </a:prstGeom>
-          <a:ln w="11430">
-            <a:solidFill>
-              <a:srgbClr val="404040"/>
-            </a:solidFill>
-            <a:tailEnd type="triangle" w="sm" len="sm"/>
-          </a:ln>
-        </p:spPr>
-        <p:style>
-          <a:lnRef idx="2">
-            <a:schemeClr val="accent1"/>
-          </a:lnRef>
-          <a:fillRef idx="0">
-            <a:schemeClr val="accent1"/>
-          </a:fillRef>
-          <a:effectRef idx="1">
-            <a:schemeClr val="accent1"/>
-          </a:effectRef>
-          <a:fontRef idx="minor">
-            <a:schemeClr val="tx1"/>
-          </a:fontRef>
-        </p:style>
-      </p:cxnSp>
-      <p:sp>
-        <p:nvSpPr>
-          <p:cNvPr id="45" name="TextBox 45"/>
-          <p:cNvSpPr txBox="1"/>
-          <p:nvPr/>
-        </p:nvSpPr>
-        <p:spPr>
-          <a:xfrm>
-            <a:off x="5242500" y="1908000"/>
-            <a:ext cx="360000" cy="144000"/>
-          </a:xfrm>
-          <a:prstGeom prst="rect">
-            <a:avLst/>
-          </a:prstGeom>
-          <a:noFill/>
-        </p:spPr>
-        <p:txBody>
-          <a:bodyPr wrap="square">
-            <a:spAutoFit/>
-          </a:bodyPr>
-          <a:lstStyle/>
-          <a:p>
-            <a:r>
-              <a:rPr sz="650" b="1">
-                <a:solidFill>
-                  <a:srgbClr val="333333"/>
-                </a:solidFill>
-                <a:latin typeface="맑은 고딕"/>
-                <a:ea typeface="맑은 고딕"/>
-              </a:rPr>
-              <a:t>NO</a:t>
-            </a:r>
-          </a:p>
-        </p:txBody>
-      </p:sp>
-      <p:cxnSp>
-        <p:nvCxnSpPr>
-          <p:cNvPr id="46" name="Connector 46"/>
-          <p:cNvCxnSpPr/>
-          <p:nvPr/>
-        </p:nvCxnSpPr>
-        <p:spPr>
-          <a:xfrm>
-            <a:off x="4540500" y="2736000"/>
-            <a:ext cx="0" cy="180000"/>
-          </a:xfrm>
-          <a:prstGeom prst="line">
-            <a:avLst/>
-          </a:prstGeom>
-          <a:ln w="11430">
-            <a:solidFill>
-              <a:srgbClr val="404040"/>
-            </a:solidFill>
-            <a:tailEnd type="triangle" w="sm" len="sm"/>
-          </a:ln>
-        </p:spPr>
-        <p:style>
-          <a:lnRef idx="2">
-            <a:schemeClr val="accent1"/>
-          </a:lnRef>
-          <a:fillRef idx="0">
-            <a:schemeClr val="accent1"/>
-          </a:fillRef>
-          <a:effectRef idx="1">
-            <a:schemeClr val="accent1"/>
-          </a:effectRef>
-          <a:fontRef idx="minor">
-            <a:schemeClr val="tx1"/>
-          </a:fontRef>
-        </p:style>
-      </p:cxnSp>
-      <p:cxnSp>
-        <p:nvCxnSpPr>
-          <p:cNvPr id="47" name="Connector 47"/>
-          <p:cNvCxnSpPr/>
-          <p:nvPr/>
-        </p:nvCxnSpPr>
-        <p:spPr>
-          <a:xfrm>
-            <a:off x="4540500" y="3312000"/>
-            <a:ext cx="0" cy="180000"/>
-          </a:xfrm>
-          <a:prstGeom prst="line">
-            <a:avLst/>
-          </a:prstGeom>
-          <a:ln w="11430">
-            <a:solidFill>
-              <a:srgbClr val="404040"/>
-            </a:solidFill>
-            <a:tailEnd type="triangle" w="sm" len="sm"/>
-          </a:ln>
-        </p:spPr>
-        <p:style>
-          <a:lnRef idx="2">
-            <a:schemeClr val="accent1"/>
-          </a:lnRef>
-          <a:fillRef idx="0">
-            <a:schemeClr val="accent1"/>
-          </a:fillRef>
-          <a:effectRef idx="1">
-            <a:schemeClr val="accent1"/>
-          </a:effectRef>
-          <a:fontRef idx="minor">
-            <a:schemeClr val="tx1"/>
-          </a:fontRef>
-        </p:style>
-      </p:cxnSp>
-      <p:sp>
-        <p:nvSpPr>
-          <p:cNvPr id="48" name="TextBox 48"/>
-          <p:cNvSpPr txBox="1"/>
-          <p:nvPr/>
-        </p:nvSpPr>
-        <p:spPr>
-          <a:xfrm>
-            <a:off x="4558500" y="3283200"/>
-            <a:ext cx="360000" cy="144000"/>
-          </a:xfrm>
-          <a:prstGeom prst="rect">
-            <a:avLst/>
-          </a:prstGeom>
-          <a:noFill/>
-        </p:spPr>
-        <p:txBody>
-          <a:bodyPr wrap="square">
-            <a:spAutoFit/>
-          </a:bodyPr>
-          <a:lstStyle/>
-          <a:p>
-            <a:r>
-              <a:rPr sz="650" b="1">
-                <a:solidFill>
-                  <a:srgbClr val="333333"/>
-                </a:solidFill>
-                <a:latin typeface="맑은 고딕"/>
-                <a:ea typeface="맑은 고딕"/>
-              </a:rPr>
-              <a:t>YES</a:t>
-            </a:r>
-          </a:p>
-        </p:txBody>
-      </p:sp>
-      <p:cxnSp>
-        <p:nvCxnSpPr>
-          <p:cNvPr id="49" name="Connector 49"/>
-          <p:cNvCxnSpPr/>
-          <p:nvPr/>
-        </p:nvCxnSpPr>
-        <p:spPr>
-          <a:xfrm>
-            <a:off x="5260500" y="3114000"/>
-            <a:ext cx="108000" cy="0"/>
-          </a:xfrm>
-          <a:prstGeom prst="line">
-            <a:avLst/>
-          </a:prstGeom>
-          <a:ln w="11430">
-            <a:solidFill>
-              <a:srgbClr val="404040"/>
-            </a:solidFill>
-          </a:ln>
-        </p:spPr>
-        <p:style>
-          <a:lnRef idx="2">
-            <a:schemeClr val="accent1"/>
-          </a:lnRef>
-          <a:fillRef idx="0">
-            <a:schemeClr val="accent1"/>
-          </a:fillRef>
-          <a:effectRef idx="1">
-            <a:schemeClr val="accent1"/>
-          </a:effectRef>
-          <a:fontRef idx="minor">
-            <a:schemeClr val="tx1"/>
-          </a:fontRef>
-        </p:style>
-      </p:cxnSp>
-      <p:cxnSp>
-        <p:nvCxnSpPr>
-          <p:cNvPr id="50" name="Connector 50"/>
-          <p:cNvCxnSpPr/>
-          <p:nvPr/>
-        </p:nvCxnSpPr>
-        <p:spPr>
-          <a:xfrm>
-            <a:off x="5368500" y="3114000"/>
-            <a:ext cx="0" cy="1458000"/>
-          </a:xfrm>
-          <a:prstGeom prst="line">
-            <a:avLst/>
-          </a:prstGeom>
-          <a:ln w="11430">
-            <a:solidFill>
-              <a:srgbClr val="404040"/>
-            </a:solidFill>
-          </a:ln>
-        </p:spPr>
-        <p:style>
-          <a:lnRef idx="2">
-            <a:schemeClr val="accent1"/>
-          </a:lnRef>
-          <a:fillRef idx="0">
-            <a:schemeClr val="accent1"/>
-          </a:fillRef>
-          <a:effectRef idx="1">
-            <a:schemeClr val="accent1"/>
-          </a:effectRef>
-          <a:fontRef idx="minor">
-            <a:schemeClr val="tx1"/>
-          </a:fontRef>
-        </p:style>
-      </p:cxnSp>
-      <p:cxnSp>
-        <p:nvCxnSpPr>
-          <p:cNvPr id="51" name="Connector 51"/>
-          <p:cNvCxnSpPr/>
-          <p:nvPr/>
-        </p:nvCxnSpPr>
-        <p:spPr>
-          <a:xfrm flipH="1">
-            <a:off x="5188500" y="4572000"/>
-            <a:ext cx="180000" cy="0"/>
-          </a:xfrm>
-          <a:prstGeom prst="line">
-            <a:avLst/>
-          </a:prstGeom>
-          <a:ln w="11430">
-            <a:solidFill>
-              <a:srgbClr val="404040"/>
-            </a:solidFill>
-            <a:tailEnd type="triangle" w="sm" len="sm"/>
-          </a:ln>
-        </p:spPr>
-        <p:style>
-          <a:lnRef idx="2">
-            <a:schemeClr val="accent1"/>
-          </a:lnRef>
-          <a:fillRef idx="0">
-            <a:schemeClr val="accent1"/>
-          </a:fillRef>
-          <a:effectRef idx="1">
-            <a:schemeClr val="accent1"/>
-          </a:effectRef>
-          <a:fontRef idx="minor">
-            <a:schemeClr val="tx1"/>
-          </a:fontRef>
-        </p:style>
-      </p:cxnSp>
-      <p:sp>
-        <p:nvSpPr>
-          <p:cNvPr id="52" name="TextBox 52"/>
-          <p:cNvSpPr txBox="1"/>
-          <p:nvPr/>
-        </p:nvSpPr>
-        <p:spPr>
-          <a:xfrm>
-            <a:off x="5242500" y="2952000"/>
-            <a:ext cx="360000" cy="144000"/>
-          </a:xfrm>
-          <a:prstGeom prst="rect">
-            <a:avLst/>
-          </a:prstGeom>
-          <a:noFill/>
-        </p:spPr>
-        <p:txBody>
-          <a:bodyPr wrap="square">
-            <a:spAutoFit/>
-          </a:bodyPr>
-          <a:lstStyle/>
-          <a:p>
-            <a:r>
-              <a:rPr sz="650" b="1">
-                <a:solidFill>
-                  <a:srgbClr val="333333"/>
-                </a:solidFill>
-                <a:latin typeface="맑은 고딕"/>
-                <a:ea typeface="맑은 고딕"/>
-              </a:rPr>
-              <a:t>NO</a:t>
-            </a:r>
-          </a:p>
-        </p:txBody>
-      </p:sp>
-      <p:cxnSp>
-        <p:nvCxnSpPr>
-          <p:cNvPr id="53" name="Connector 53"/>
-          <p:cNvCxnSpPr/>
-          <p:nvPr/>
-        </p:nvCxnSpPr>
-        <p:spPr>
-          <a:xfrm>
-            <a:off x="4540500" y="3780000"/>
-            <a:ext cx="0" cy="180000"/>
-          </a:xfrm>
-          <a:prstGeom prst="line">
-            <a:avLst/>
-          </a:prstGeom>
-          <a:ln w="11430">
-            <a:solidFill>
-              <a:srgbClr val="404040"/>
-            </a:solidFill>
-            <a:tailEnd type="triangle" w="sm" len="sm"/>
-          </a:ln>
-        </p:spPr>
-        <p:style>
-          <a:lnRef idx="2">
-            <a:schemeClr val="accent1"/>
-          </a:lnRef>
-          <a:fillRef idx="0">
-            <a:schemeClr val="accent1"/>
-          </a:fillRef>
-          <a:effectRef idx="1">
-            <a:schemeClr val="accent1"/>
-          </a:effectRef>
-          <a:fontRef idx="minor">
-            <a:schemeClr val="tx1"/>
-          </a:fontRef>
-        </p:style>
-      </p:cxnSp>
-      <p:sp>
-        <p:nvSpPr>
-          <p:cNvPr id="54" name="Magnetic Disk 54"/>
-          <p:cNvSpPr/>
-          <p:nvPr/>
-        </p:nvSpPr>
-        <p:spPr>
-          <a:xfrm>
-            <a:off x="6727500" y="1872000"/>
-            <a:ext cx="1296000" cy="288000"/>
-          </a:xfrm>
-          <a:prstGeom prst="flowChartMagneticDisk">
-            <a:avLst/>
-          </a:prstGeom>
-          <a:solidFill>
-            <a:srgbClr val="F2F2F2"/>
-          </a:solidFill>
-          <a:ln w="11430">
-            <a:solidFill>
-              <a:srgbClr val="404040"/>
-            </a:solidFill>
-          </a:ln>
-          <a:effectLst/>
-        </p:spPr>
-        <p:style>
-          <a:lnRef idx="1">
-            <a:schemeClr val="accent1"/>
-          </a:lnRef>
-          <a:fillRef idx="3">
-            <a:schemeClr val="accent1"/>
-          </a:fillRef>
-          <a:effectRef idx="2">
-            <a:schemeClr val="accent1"/>
-          </a:effectRef>
-          <a:fontRef idx="minor">
-            <a:schemeClr val="lt1"/>
-          </a:fontRef>
-        </p:style>
-        <p:txBody>
-          <a:bodyPr wrap="square" lIns="28800" tIns="10800" rIns="28800" bIns="10800" rtlCol="0" anchor="ctr"/>
-          <a:lstStyle/>
-          <a:p>
-            <a:pPr algn="ctr"/>
-            <a:r>
-              <a:rPr sz="750">
-                <a:solidFill>
-                  <a:srgbClr val="1A1A1A"/>
-                </a:solidFill>
-                <a:latin typeface="맑은 고딕"/>
-                <a:ea typeface="맑은 고딕"/>
-              </a:rPr>
-              <a:t>후보시간 DB</a:t>
-            </a:r>
-          </a:p>
-        </p:txBody>
-      </p:sp>
-      <p:sp>
-        <p:nvSpPr>
-          <p:cNvPr id="55" name="Document 55"/>
-          <p:cNvSpPr/>
-          <p:nvPr/>
-        </p:nvSpPr>
-        <p:spPr>
-          <a:xfrm>
-            <a:off x="6727500" y="2340000"/>
-            <a:ext cx="1296000" cy="288000"/>
-          </a:xfrm>
-          <a:prstGeom prst="flowChartDocument">
-            <a:avLst/>
-          </a:prstGeom>
-          <a:solidFill>
-            <a:srgbClr val="FFFFFF"/>
-          </a:solidFill>
-          <a:ln w="11430">
-            <a:solidFill>
-              <a:srgbClr val="404040"/>
-            </a:solidFill>
-          </a:ln>
-          <a:effectLst/>
-        </p:spPr>
-        <p:style>
-          <a:lnRef idx="1">
-            <a:schemeClr val="accent1"/>
-          </a:lnRef>
-          <a:fillRef idx="3">
-            <a:schemeClr val="accent1"/>
-          </a:fillRef>
-          <a:effectRef idx="2">
-            <a:schemeClr val="accent1"/>
-          </a:effectRef>
-          <a:fontRef idx="minor">
-            <a:schemeClr val="lt1"/>
-          </a:fontRef>
-        </p:style>
-        <p:txBody>
-          <a:bodyPr wrap="square" lIns="28800" tIns="10800" rIns="28800" bIns="10800" rtlCol="0" anchor="ctr"/>
-          <a:lstStyle/>
-          <a:p>
-            <a:pPr algn="ctr"/>
-            <a:r>
-              <a:rPr sz="750">
-                <a:solidFill>
-                  <a:srgbClr val="1A1A1A"/>
-                </a:solidFill>
-                <a:latin typeface="맑은 고딕"/>
-                <a:ea typeface="맑은 고딕"/>
-              </a:rPr>
-              <a:t>투표 (C-05)</a:t>
-            </a:r>
-          </a:p>
-        </p:txBody>
-      </p:sp>
-      <p:sp>
-        <p:nvSpPr>
-          <p:cNvPr id="56" name="Decision 56"/>
-          <p:cNvSpPr/>
-          <p:nvPr/>
-        </p:nvSpPr>
-        <p:spPr>
-          <a:xfrm>
-            <a:off x="6655500" y="2808000"/>
-            <a:ext cx="1440000" cy="396000"/>
-          </a:xfrm>
-          <a:prstGeom prst="flowChartDecision">
-            <a:avLst/>
-          </a:prstGeom>
-          <a:solidFill>
-            <a:srgbClr val="EDEDED"/>
-          </a:solidFill>
-          <a:ln w="11430">
-            <a:solidFill>
-              <a:srgbClr val="404040"/>
-            </a:solidFill>
-          </a:ln>
-          <a:effectLst/>
-        </p:spPr>
-        <p:style>
-          <a:lnRef idx="1">
-            <a:schemeClr val="accent1"/>
-          </a:lnRef>
-          <a:fillRef idx="3">
-            <a:schemeClr val="accent1"/>
-          </a:fillRef>
-          <a:effectRef idx="2">
-            <a:schemeClr val="accent1"/>
-          </a:effectRef>
-          <a:fontRef idx="minor">
-            <a:schemeClr val="lt1"/>
-          </a:fontRef>
-        </p:style>
-        <p:txBody>
-          <a:bodyPr wrap="square" lIns="28800" tIns="10800" rIns="28800" bIns="10800" rtlCol="0" anchor="ctr"/>
-          <a:lstStyle/>
-          <a:p>
-            <a:pPr algn="ctr"/>
-            <a:r>
-              <a:rPr sz="750">
-                <a:solidFill>
-                  <a:srgbClr val="1A1A1A"/>
-                </a:solidFill>
-                <a:latin typeface="맑은 고딕"/>
-                <a:ea typeface="맑은 고딕"/>
-              </a:rPr>
-              <a:t>전원 투표?</a:t>
-            </a:r>
-          </a:p>
-        </p:txBody>
-      </p:sp>
-      <p:sp>
-        <p:nvSpPr>
-          <p:cNvPr id="57" name="Process 57"/>
-          <p:cNvSpPr/>
-          <p:nvPr/>
-        </p:nvSpPr>
-        <p:spPr>
-          <a:xfrm>
-            <a:off x="6727500" y="3384000"/>
-            <a:ext cx="1296000" cy="288000"/>
-          </a:xfrm>
-          <a:prstGeom prst="flowChartProcess">
-            <a:avLst/>
-          </a:prstGeom>
-          <a:solidFill>
-            <a:srgbClr val="FFFFFF"/>
-          </a:solidFill>
-          <a:ln w="11430">
-            <a:solidFill>
-              <a:srgbClr val="404040"/>
-            </a:solidFill>
-          </a:ln>
-          <a:effectLst/>
-        </p:spPr>
-        <p:style>
-          <a:lnRef idx="1">
-            <a:schemeClr val="accent1"/>
-          </a:lnRef>
-          <a:fillRef idx="3">
-            <a:schemeClr val="accent1"/>
-          </a:fillRef>
-          <a:effectRef idx="2">
-            <a:schemeClr val="accent1"/>
-          </a:effectRef>
-          <a:fontRef idx="minor">
-            <a:schemeClr val="lt1"/>
-          </a:fontRef>
-        </p:style>
-        <p:txBody>
-          <a:bodyPr wrap="square" lIns="28800" tIns="10800" rIns="28800" bIns="10800" rtlCol="0" anchor="ctr"/>
-          <a:lstStyle/>
-          <a:p>
-            <a:pPr algn="ctr"/>
-            <a:r>
-              <a:rPr sz="750">
-                <a:solidFill>
-                  <a:srgbClr val="1A1A1A"/>
-                </a:solidFill>
-                <a:latin typeface="맑은 고딕"/>
-                <a:ea typeface="맑은 고딕"/>
-              </a:rPr>
-              <a:t>최다 득표 확정</a:t>
-            </a:r>
-          </a:p>
-        </p:txBody>
-      </p:sp>
-      <p:sp>
-        <p:nvSpPr>
-          <p:cNvPr id="58" name="TextBox 58"/>
-          <p:cNvSpPr txBox="1"/>
-          <p:nvPr/>
-        </p:nvSpPr>
-        <p:spPr>
-          <a:xfrm>
-            <a:off x="8059500" y="3366000"/>
-            <a:ext cx="841500" cy="360000"/>
-          </a:xfrm>
-          <a:prstGeom prst="rect">
-            <a:avLst/>
-          </a:prstGeom>
-          <a:noFill/>
-        </p:spPr>
-        <p:txBody>
-          <a:bodyPr wrap="square">
-            <a:spAutoFit/>
-          </a:bodyPr>
-          <a:lstStyle/>
-          <a:p>
-            <a:r>
-              <a:rPr sz="650" b="0">
-                <a:solidFill>
-                  <a:srgbClr val="595959"/>
-                </a:solidFill>
-                <a:latin typeface="맑은 고딕"/>
-                <a:ea typeface="맑은 고딕"/>
-              </a:rPr>
-              <a:t>· 동점이면 날짜가 빠른 쪽</a:t>
-            </a:r>
-          </a:p>
-          <a:p>
-            <a:r>
-              <a:rPr sz="650" b="0">
-                <a:solidFill>
-                  <a:srgbClr val="595959"/>
-                </a:solidFill>
-                <a:latin typeface="맑은 고딕"/>
-                <a:ea typeface="맑은 고딕"/>
-              </a:rPr>
-              <a:t>· 후보 0개면 다시 요청</a:t>
-            </a:r>
-          </a:p>
-        </p:txBody>
-      </p:sp>
-      <p:sp>
-        <p:nvSpPr>
-          <p:cNvPr id="59" name="Magnetic Disk 59"/>
-          <p:cNvSpPr/>
-          <p:nvPr/>
-        </p:nvSpPr>
-        <p:spPr>
-          <a:xfrm>
-            <a:off x="6727500" y="3852000"/>
-            <a:ext cx="1296000" cy="288000"/>
-          </a:xfrm>
-          <a:prstGeom prst="flowChartMagneticDisk">
-            <a:avLst/>
-          </a:prstGeom>
-          <a:solidFill>
-            <a:srgbClr val="F2F2F2"/>
-          </a:solidFill>
-          <a:ln w="11430">
-            <a:solidFill>
-              <a:srgbClr val="404040"/>
-            </a:solidFill>
-          </a:ln>
-          <a:effectLst/>
-        </p:spPr>
-        <p:style>
-          <a:lnRef idx="1">
-            <a:schemeClr val="accent1"/>
-          </a:lnRef>
-          <a:fillRef idx="3">
-            <a:schemeClr val="accent1"/>
-          </a:fillRef>
-          <a:effectRef idx="2">
-            <a:schemeClr val="accent1"/>
-          </a:effectRef>
-          <a:fontRef idx="minor">
-            <a:schemeClr val="lt1"/>
-          </a:fontRef>
-        </p:style>
-        <p:txBody>
-          <a:bodyPr wrap="square" lIns="28800" tIns="10800" rIns="28800" bIns="10800" rtlCol="0" anchor="ctr"/>
-          <a:lstStyle/>
-          <a:p>
-            <a:pPr algn="ctr"/>
-            <a:r>
-              <a:rPr sz="750">
-                <a:solidFill>
-                  <a:srgbClr val="1A1A1A"/>
-                </a:solidFill>
-                <a:latin typeface="맑은 고딕"/>
-                <a:ea typeface="맑은 고딕"/>
-              </a:rPr>
-              <a:t>확정일정 DB</a:t>
-            </a:r>
-          </a:p>
-        </p:txBody>
-      </p:sp>
-      <p:sp>
-        <p:nvSpPr>
-          <p:cNvPr id="60" name="Process 60"/>
-          <p:cNvSpPr/>
-          <p:nvPr/>
-        </p:nvSpPr>
-        <p:spPr>
-          <a:xfrm>
-            <a:off x="6727500" y="4320000"/>
-            <a:ext cx="1296000" cy="288000"/>
-          </a:xfrm>
-          <a:prstGeom prst="flowChartProcess">
-            <a:avLst/>
-          </a:prstGeom>
-          <a:solidFill>
-            <a:srgbClr val="FFFFFF"/>
-          </a:solidFill>
-          <a:ln w="11430">
-            <a:solidFill>
-              <a:srgbClr val="404040"/>
-            </a:solidFill>
-          </a:ln>
-          <a:effectLst/>
-        </p:spPr>
-        <p:style>
-          <a:lnRef idx="1">
-            <a:schemeClr val="accent1"/>
-          </a:lnRef>
-          <a:fillRef idx="3">
-            <a:schemeClr val="accent1"/>
-          </a:fillRef>
-          <a:effectRef idx="2">
-            <a:schemeClr val="accent1"/>
-          </a:effectRef>
-          <a:fontRef idx="minor">
-            <a:schemeClr val="lt1"/>
-          </a:fontRef>
-        </p:style>
-        <p:txBody>
-          <a:bodyPr wrap="square" lIns="28800" tIns="10800" rIns="28800" bIns="10800" rtlCol="0" anchor="ctr"/>
-          <a:lstStyle/>
-          <a:p>
-            <a:pPr algn="ctr"/>
-            <a:r>
-              <a:rPr sz="750">
-                <a:solidFill>
-                  <a:srgbClr val="1A1A1A"/>
-                </a:solidFill>
-                <a:latin typeface="맑은 고딕"/>
-                <a:ea typeface="맑은 고딕"/>
-              </a:rPr>
-              <a:t>마감 뒤 확정 (미정)</a:t>
-            </a:r>
-          </a:p>
-        </p:txBody>
-      </p:sp>
-      <p:cxnSp>
-        <p:nvCxnSpPr>
-          <p:cNvPr id="61" name="Connector 61"/>
-          <p:cNvCxnSpPr/>
-          <p:nvPr/>
-        </p:nvCxnSpPr>
-        <p:spPr>
-          <a:xfrm>
-            <a:off x="7375500" y="2160000"/>
-            <a:ext cx="0" cy="180000"/>
-          </a:xfrm>
-          <a:prstGeom prst="line">
-            <a:avLst/>
-          </a:prstGeom>
-          <a:ln w="11430">
-            <a:solidFill>
-              <a:srgbClr val="404040"/>
-            </a:solidFill>
-            <a:tailEnd type="triangle" w="sm" len="sm"/>
-          </a:ln>
-        </p:spPr>
-        <p:style>
-          <a:lnRef idx="2">
-            <a:schemeClr val="accent1"/>
-          </a:lnRef>
-          <a:fillRef idx="0">
-            <a:schemeClr val="accent1"/>
-          </a:fillRef>
-          <a:effectRef idx="1">
-            <a:schemeClr val="accent1"/>
-          </a:effectRef>
-          <a:fontRef idx="minor">
-            <a:schemeClr val="tx1"/>
-          </a:fontRef>
-        </p:style>
-      </p:cxnSp>
-      <p:cxnSp>
-        <p:nvCxnSpPr>
-          <p:cNvPr id="62" name="Connector 62"/>
-          <p:cNvCxnSpPr/>
-          <p:nvPr/>
-        </p:nvCxnSpPr>
-        <p:spPr>
-          <a:xfrm>
-            <a:off x="7375500" y="2628000"/>
-            <a:ext cx="0" cy="180000"/>
-          </a:xfrm>
-          <a:prstGeom prst="line">
-            <a:avLst/>
-          </a:prstGeom>
-          <a:ln w="11430">
-            <a:solidFill>
-              <a:srgbClr val="404040"/>
-            </a:solidFill>
-            <a:tailEnd type="triangle" w="sm" len="sm"/>
-          </a:ln>
-        </p:spPr>
-        <p:style>
-          <a:lnRef idx="2">
-            <a:schemeClr val="accent1"/>
-          </a:lnRef>
-          <a:fillRef idx="0">
-            <a:schemeClr val="accent1"/>
-          </a:fillRef>
-          <a:effectRef idx="1">
-            <a:schemeClr val="accent1"/>
-          </a:effectRef>
-          <a:fontRef idx="minor">
-            <a:schemeClr val="tx1"/>
-          </a:fontRef>
-        </p:style>
-      </p:cxnSp>
-      <p:cxnSp>
-        <p:nvCxnSpPr>
-          <p:cNvPr id="63" name="Connector 63"/>
-          <p:cNvCxnSpPr/>
-          <p:nvPr/>
-        </p:nvCxnSpPr>
-        <p:spPr>
-          <a:xfrm>
-            <a:off x="7375500" y="3204000"/>
-            <a:ext cx="0" cy="180000"/>
-          </a:xfrm>
-          <a:prstGeom prst="line">
-            <a:avLst/>
-          </a:prstGeom>
-          <a:ln w="11430">
-            <a:solidFill>
-              <a:srgbClr val="404040"/>
-            </a:solidFill>
-            <a:tailEnd type="triangle" w="sm" len="sm"/>
-          </a:ln>
-        </p:spPr>
-        <p:style>
-          <a:lnRef idx="2">
-            <a:schemeClr val="accent1"/>
-          </a:lnRef>
-          <a:fillRef idx="0">
-            <a:schemeClr val="accent1"/>
-          </a:fillRef>
-          <a:effectRef idx="1">
-            <a:schemeClr val="accent1"/>
-          </a:effectRef>
-          <a:fontRef idx="minor">
-            <a:schemeClr val="tx1"/>
-          </a:fontRef>
-        </p:style>
-      </p:cxnSp>
-      <p:sp>
-        <p:nvSpPr>
-          <p:cNvPr id="64" name="TextBox 64"/>
-          <p:cNvSpPr txBox="1"/>
-          <p:nvPr/>
-        </p:nvSpPr>
-        <p:spPr>
-          <a:xfrm>
-            <a:off x="7393500" y="3175200"/>
-            <a:ext cx="360000" cy="144000"/>
-          </a:xfrm>
-          <a:prstGeom prst="rect">
-            <a:avLst/>
-          </a:prstGeom>
-          <a:noFill/>
-        </p:spPr>
-        <p:txBody>
-          <a:bodyPr wrap="square">
-            <a:spAutoFit/>
-          </a:bodyPr>
-          <a:lstStyle/>
-          <a:p>
-            <a:r>
-              <a:rPr sz="650" b="1">
-                <a:solidFill>
-                  <a:srgbClr val="333333"/>
-                </a:solidFill>
-                <a:latin typeface="맑은 고딕"/>
-                <a:ea typeface="맑은 고딕"/>
-              </a:rPr>
-              <a:t>YES</a:t>
-            </a:r>
-          </a:p>
-        </p:txBody>
-      </p:sp>
-      <p:cxnSp>
-        <p:nvCxnSpPr>
-          <p:cNvPr id="65" name="Connector 65"/>
-          <p:cNvCxnSpPr/>
-          <p:nvPr/>
-        </p:nvCxnSpPr>
-        <p:spPr>
-          <a:xfrm>
-            <a:off x="8095500" y="3006000"/>
-            <a:ext cx="108000" cy="0"/>
-          </a:xfrm>
-          <a:prstGeom prst="line">
-            <a:avLst/>
-          </a:prstGeom>
-          <a:ln w="11430">
-            <a:solidFill>
-              <a:srgbClr val="404040"/>
-            </a:solidFill>
-          </a:ln>
-        </p:spPr>
-        <p:style>
-          <a:lnRef idx="2">
-            <a:schemeClr val="accent1"/>
-          </a:lnRef>
-          <a:fillRef idx="0">
-            <a:schemeClr val="accent1"/>
-          </a:fillRef>
-          <a:effectRef idx="1">
-            <a:schemeClr val="accent1"/>
-          </a:effectRef>
-          <a:fontRef idx="minor">
-            <a:schemeClr val="tx1"/>
-          </a:fontRef>
-        </p:style>
-      </p:cxnSp>
-      <p:cxnSp>
-        <p:nvCxnSpPr>
-          <p:cNvPr id="66" name="Connector 66"/>
-          <p:cNvCxnSpPr/>
-          <p:nvPr/>
-        </p:nvCxnSpPr>
-        <p:spPr>
-          <a:xfrm>
-            <a:off x="8203500" y="3006000"/>
-            <a:ext cx="0" cy="1458000"/>
-          </a:xfrm>
-          <a:prstGeom prst="line">
-            <a:avLst/>
-          </a:prstGeom>
-          <a:ln w="11430">
-            <a:solidFill>
-              <a:srgbClr val="404040"/>
-            </a:solidFill>
-          </a:ln>
-        </p:spPr>
-        <p:style>
-          <a:lnRef idx="2">
-            <a:schemeClr val="accent1"/>
-          </a:lnRef>
-          <a:fillRef idx="0">
-            <a:schemeClr val="accent1"/>
-          </a:fillRef>
-          <a:effectRef idx="1">
-            <a:schemeClr val="accent1"/>
-          </a:effectRef>
-          <a:fontRef idx="minor">
-            <a:schemeClr val="tx1"/>
-          </a:fontRef>
-        </p:style>
-      </p:cxnSp>
-      <p:cxnSp>
-        <p:nvCxnSpPr>
-          <p:cNvPr id="67" name="Connector 67"/>
-          <p:cNvCxnSpPr/>
-          <p:nvPr/>
-        </p:nvCxnSpPr>
-        <p:spPr>
-          <a:xfrm flipH="1">
-            <a:off x="8023500" y="4464000"/>
-            <a:ext cx="180000" cy="0"/>
-          </a:xfrm>
-          <a:prstGeom prst="line">
-            <a:avLst/>
-          </a:prstGeom>
-          <a:ln w="11430">
-            <a:solidFill>
-              <a:srgbClr val="404040"/>
-            </a:solidFill>
-            <a:tailEnd type="triangle" w="sm" len="sm"/>
-          </a:ln>
-        </p:spPr>
-        <p:style>
-          <a:lnRef idx="2">
-            <a:schemeClr val="accent1"/>
-          </a:lnRef>
-          <a:fillRef idx="0">
-            <a:schemeClr val="accent1"/>
-          </a:fillRef>
-          <a:effectRef idx="1">
-            <a:schemeClr val="accent1"/>
-          </a:effectRef>
-          <a:fontRef idx="minor">
-            <a:schemeClr val="tx1"/>
-          </a:fontRef>
-        </p:style>
-      </p:cxnSp>
-      <p:sp>
-        <p:nvSpPr>
-          <p:cNvPr id="68" name="TextBox 68"/>
-          <p:cNvSpPr txBox="1"/>
-          <p:nvPr/>
-        </p:nvSpPr>
-        <p:spPr>
-          <a:xfrm>
-            <a:off x="8077500" y="2844000"/>
-            <a:ext cx="360000" cy="144000"/>
-          </a:xfrm>
-          <a:prstGeom prst="rect">
-            <a:avLst/>
-          </a:prstGeom>
-          <a:noFill/>
-        </p:spPr>
-        <p:txBody>
-          <a:bodyPr wrap="square">
-            <a:spAutoFit/>
-          </a:bodyPr>
-          <a:lstStyle/>
-          <a:p>
-            <a:r>
-              <a:rPr sz="650" b="1">
-                <a:solidFill>
-                  <a:srgbClr val="333333"/>
-                </a:solidFill>
-                <a:latin typeface="맑은 고딕"/>
-                <a:ea typeface="맑은 고딕"/>
-              </a:rPr>
-              <a:t>NO</a:t>
-            </a:r>
-          </a:p>
-        </p:txBody>
-      </p:sp>
-      <p:cxnSp>
-        <p:nvCxnSpPr>
-          <p:cNvPr id="69" name="Connector 69"/>
-          <p:cNvCxnSpPr/>
-          <p:nvPr/>
-        </p:nvCxnSpPr>
-        <p:spPr>
-          <a:xfrm>
-            <a:off x="7375500" y="3672000"/>
-            <a:ext cx="0" cy="180000"/>
-          </a:xfrm>
-          <a:prstGeom prst="line">
-            <a:avLst/>
-          </a:prstGeom>
-          <a:ln w="11430">
-            <a:solidFill>
-              <a:srgbClr val="404040"/>
-            </a:solidFill>
-            <a:tailEnd type="triangle" w="sm" len="sm"/>
-          </a:ln>
-        </p:spPr>
-        <p:style>
-          <a:lnRef idx="2">
-            <a:schemeClr val="accent1"/>
-          </a:lnRef>
-          <a:fillRef idx="0">
-            <a:schemeClr val="accent1"/>
-          </a:fillRef>
-          <a:effectRef idx="1">
-            <a:schemeClr val="accent1"/>
-          </a:effectRef>
-          <a:fontRef idx="minor">
-            <a:schemeClr val="tx1"/>
-          </a:fontRef>
-        </p:style>
-      </p:cxnSp>
-      <p:sp>
-        <p:nvSpPr>
-          <p:cNvPr id="70" name="Process 70"/>
-          <p:cNvSpPr/>
-          <p:nvPr/>
-        </p:nvSpPr>
-        <p:spPr>
-          <a:xfrm>
-            <a:off x="9562500" y="1872000"/>
-            <a:ext cx="1296000" cy="288000"/>
-          </a:xfrm>
-          <a:prstGeom prst="flowChartProcess">
-            <a:avLst/>
-          </a:prstGeom>
-          <a:solidFill>
-            <a:srgbClr val="FFFFFF"/>
-          </a:solidFill>
-          <a:ln w="11430">
-            <a:solidFill>
-              <a:srgbClr val="404040"/>
-            </a:solidFill>
-          </a:ln>
-          <a:effectLst/>
-        </p:spPr>
-        <p:style>
-          <a:lnRef idx="1">
-            <a:schemeClr val="accent1"/>
-          </a:lnRef>
-          <a:fillRef idx="3">
-            <a:schemeClr val="accent1"/>
-          </a:fillRef>
-          <a:effectRef idx="2">
-            <a:schemeClr val="accent1"/>
-          </a:effectRef>
-          <a:fontRef idx="minor">
-            <a:schemeClr val="lt1"/>
-          </a:fontRef>
-        </p:style>
-        <p:txBody>
-          <a:bodyPr wrap="square" lIns="28800" tIns="10800" rIns="28800" bIns="10800" rtlCol="0" anchor="ctr"/>
-          <a:lstStyle/>
-          <a:p>
-            <a:pPr algn="ctr"/>
-            <a:r>
-              <a:rPr sz="750">
-                <a:solidFill>
-                  <a:srgbClr val="1A1A1A"/>
-                </a:solidFill>
-                <a:latin typeface="맑은 고딕"/>
-                <a:ea typeface="맑은 고딕"/>
-              </a:rPr>
-              <a:t>디스코드 자동 공지</a:t>
-            </a:r>
-          </a:p>
-        </p:txBody>
-      </p:sp>
-      <p:sp>
-        <p:nvSpPr>
-          <p:cNvPr id="71" name="Decision 71"/>
-          <p:cNvSpPr/>
-          <p:nvPr/>
-        </p:nvSpPr>
-        <p:spPr>
-          <a:xfrm>
-            <a:off x="9490500" y="2340000"/>
-            <a:ext cx="1440000" cy="396000"/>
-          </a:xfrm>
-          <a:prstGeom prst="flowChartDecision">
-            <a:avLst/>
-          </a:prstGeom>
-          <a:solidFill>
-            <a:srgbClr val="EDEDED"/>
-          </a:solidFill>
-          <a:ln w="11430">
-            <a:solidFill>
-              <a:srgbClr val="404040"/>
-            </a:solidFill>
-          </a:ln>
-          <a:effectLst/>
-        </p:spPr>
-        <p:style>
-          <a:lnRef idx="1">
-            <a:schemeClr val="accent1"/>
-          </a:lnRef>
-          <a:fillRef idx="3">
-            <a:schemeClr val="accent1"/>
-          </a:fillRef>
-          <a:effectRef idx="2">
-            <a:schemeClr val="accent1"/>
-          </a:effectRef>
-          <a:fontRef idx="minor">
-            <a:schemeClr val="lt1"/>
-          </a:fontRef>
-        </p:style>
-        <p:txBody>
-          <a:bodyPr wrap="square" lIns="28800" tIns="10800" rIns="28800" bIns="10800" rtlCol="0" anchor="ctr"/>
-          <a:lstStyle/>
-          <a:p>
-            <a:pPr algn="ctr"/>
-            <a:r>
-              <a:rPr sz="750">
-                <a:solidFill>
-                  <a:srgbClr val="1A1A1A"/>
-                </a:solidFill>
-                <a:latin typeface="맑은 고딕"/>
-                <a:ea typeface="맑은 고딕"/>
-              </a:rPr>
-              <a:t>변경 시작?</a:t>
-            </a:r>
-          </a:p>
-        </p:txBody>
-      </p:sp>
-      <p:sp>
-        <p:nvSpPr>
-          <p:cNvPr id="72" name="Process 72"/>
-          <p:cNvSpPr/>
-          <p:nvPr/>
-        </p:nvSpPr>
-        <p:spPr>
-          <a:xfrm>
-            <a:off x="9562500" y="2916000"/>
-            <a:ext cx="1296000" cy="288000"/>
-          </a:xfrm>
-          <a:prstGeom prst="flowChartProcess">
-            <a:avLst/>
-          </a:prstGeom>
-          <a:solidFill>
-            <a:srgbClr val="FFFFFF"/>
-          </a:solidFill>
-          <a:ln w="11430">
-            <a:solidFill>
-              <a:srgbClr val="404040"/>
-            </a:solidFill>
-          </a:ln>
-          <a:effectLst/>
-        </p:spPr>
-        <p:style>
-          <a:lnRef idx="1">
-            <a:schemeClr val="accent1"/>
-          </a:lnRef>
-          <a:fillRef idx="3">
-            <a:schemeClr val="accent1"/>
-          </a:fillRef>
-          <a:effectRef idx="2">
-            <a:schemeClr val="accent1"/>
-          </a:effectRef>
-          <a:fontRef idx="minor">
-            <a:schemeClr val="lt1"/>
-          </a:fontRef>
-        </p:style>
-        <p:txBody>
-          <a:bodyPr wrap="square" lIns="28800" tIns="10800" rIns="28800" bIns="10800" rtlCol="0" anchor="ctr"/>
-          <a:lstStyle/>
-          <a:p>
-            <a:pPr algn="ctr"/>
-            <a:r>
-              <a:rPr sz="750">
-                <a:solidFill>
-                  <a:srgbClr val="1A1A1A"/>
-                </a:solidFill>
-                <a:latin typeface="맑은 고딕"/>
-                <a:ea typeface="맑은 고딕"/>
-              </a:rPr>
-              <a:t>확정을 변경으로 취소</a:t>
-            </a:r>
-          </a:p>
-        </p:txBody>
-      </p:sp>
-      <p:sp>
-        <p:nvSpPr>
-          <p:cNvPr id="73" name="TextBox 73"/>
-          <p:cNvSpPr txBox="1"/>
-          <p:nvPr/>
-        </p:nvSpPr>
-        <p:spPr>
-          <a:xfrm>
-            <a:off x="10894500" y="2898000"/>
-            <a:ext cx="841500" cy="360000"/>
-          </a:xfrm>
-          <a:prstGeom prst="rect">
-            <a:avLst/>
-          </a:prstGeom>
-          <a:noFill/>
-        </p:spPr>
-        <p:txBody>
-          <a:bodyPr wrap="square">
-            <a:spAutoFit/>
-          </a:bodyPr>
-          <a:lstStyle/>
-          <a:p>
-            <a:r>
-              <a:rPr sz="650" b="0">
-                <a:solidFill>
-                  <a:srgbClr val="595959"/>
-                </a:solidFill>
-                <a:latin typeface="맑은 고딕"/>
-                <a:ea typeface="맑은 고딕"/>
-              </a:rPr>
-              <a:t>· 사유를 남긴다</a:t>
-            </a:r>
-          </a:p>
-          <a:p>
-            <a:r>
-              <a:rPr sz="650" b="0">
-                <a:solidFill>
-                  <a:srgbClr val="595959"/>
-                </a:solidFill>
-                <a:latin typeface="맑은 고딕"/>
-                <a:ea typeface="맑은 고딕"/>
-              </a:rPr>
-              <a:t>· 전원에게 알림</a:t>
-            </a:r>
-          </a:p>
-        </p:txBody>
-      </p:sp>
-      <p:sp>
-        <p:nvSpPr>
-          <p:cNvPr id="74" name="Process 74"/>
-          <p:cNvSpPr/>
-          <p:nvPr/>
-        </p:nvSpPr>
-        <p:spPr>
-          <a:xfrm>
-            <a:off x="9562500" y="3384000"/>
-            <a:ext cx="1296000" cy="288000"/>
-          </a:xfrm>
-          <a:prstGeom prst="flowChartProcess">
-            <a:avLst/>
-          </a:prstGeom>
-          <a:solidFill>
-            <a:srgbClr val="FFFFFF"/>
-          </a:solidFill>
-          <a:ln w="11430">
-            <a:solidFill>
-              <a:srgbClr val="404040"/>
-            </a:solidFill>
-          </a:ln>
-          <a:effectLst/>
-        </p:spPr>
-        <p:style>
-          <a:lnRef idx="1">
-            <a:schemeClr val="accent1"/>
-          </a:lnRef>
-          <a:fillRef idx="3">
-            <a:schemeClr val="accent1"/>
-          </a:fillRef>
-          <a:effectRef idx="2">
-            <a:schemeClr val="accent1"/>
-          </a:effectRef>
-          <a:fontRef idx="minor">
-            <a:schemeClr val="lt1"/>
-          </a:fontRef>
-        </p:style>
-        <p:txBody>
-          <a:bodyPr wrap="square" lIns="28800" tIns="10800" rIns="28800" bIns="10800" rtlCol="0" anchor="ctr"/>
-          <a:lstStyle/>
-          <a:p>
-            <a:pPr algn="ctr"/>
-            <a:r>
-              <a:rPr sz="750">
-                <a:solidFill>
-                  <a:srgbClr val="1A1A1A"/>
-                </a:solidFill>
-                <a:latin typeface="맑은 고딕"/>
-                <a:ea typeface="맑은 고딕"/>
-              </a:rPr>
-              <a:t>회차 올리고 다시 투표</a:t>
-            </a:r>
-          </a:p>
-        </p:txBody>
-      </p:sp>
-      <p:sp>
-        <p:nvSpPr>
-          <p:cNvPr id="75" name="Terminator 75"/>
-          <p:cNvSpPr/>
-          <p:nvPr/>
-        </p:nvSpPr>
-        <p:spPr>
-          <a:xfrm>
-            <a:off x="9562500" y="3852000"/>
-            <a:ext cx="1296000" cy="288000"/>
-          </a:xfrm>
-          <a:prstGeom prst="flowChartTerminator">
-            <a:avLst/>
-          </a:prstGeom>
-          <a:solidFill>
-            <a:srgbClr val="D9D9D9"/>
-          </a:solidFill>
-          <a:ln w="11430">
-            <a:solidFill>
-              <a:srgbClr val="404040"/>
-            </a:solidFill>
-          </a:ln>
-          <a:effectLst/>
-        </p:spPr>
-        <p:style>
-          <a:lnRef idx="1">
-            <a:schemeClr val="accent1"/>
-          </a:lnRef>
-          <a:fillRef idx="3">
-            <a:schemeClr val="accent1"/>
-          </a:fillRef>
-          <a:effectRef idx="2">
-            <a:schemeClr val="accent1"/>
-          </a:effectRef>
-          <a:fontRef idx="minor">
-            <a:schemeClr val="lt1"/>
-          </a:fontRef>
-        </p:style>
-        <p:txBody>
-          <a:bodyPr wrap="square" lIns="28800" tIns="10800" rIns="28800" bIns="10800" rtlCol="0" anchor="ctr"/>
-          <a:lstStyle/>
-          <a:p>
-            <a:pPr algn="ctr"/>
-            <a:r>
-              <a:rPr sz="750">
-                <a:solidFill>
-                  <a:srgbClr val="1A1A1A"/>
-                </a:solidFill>
-                <a:latin typeface="맑은 고딕"/>
-                <a:ea typeface="맑은 고딕"/>
-              </a:rPr>
-              <a:t>End</a:t>
-            </a:r>
-          </a:p>
-        </p:txBody>
-      </p:sp>
-      <p:cxnSp>
-        <p:nvCxnSpPr>
-          <p:cNvPr id="76" name="Connector 76"/>
-          <p:cNvCxnSpPr/>
-          <p:nvPr/>
-        </p:nvCxnSpPr>
-        <p:spPr>
-          <a:xfrm>
-            <a:off x="10210500" y="2160000"/>
-            <a:ext cx="0" cy="180000"/>
-          </a:xfrm>
-          <a:prstGeom prst="line">
-            <a:avLst/>
-          </a:prstGeom>
-          <a:ln w="11430">
-            <a:solidFill>
-              <a:srgbClr val="404040"/>
-            </a:solidFill>
-            <a:tailEnd type="triangle" w="sm" len="sm"/>
-          </a:ln>
-        </p:spPr>
-        <p:style>
-          <a:lnRef idx="2">
-            <a:schemeClr val="accent1"/>
-          </a:lnRef>
-          <a:fillRef idx="0">
-            <a:schemeClr val="accent1"/>
-          </a:fillRef>
-          <a:effectRef idx="1">
-            <a:schemeClr val="accent1"/>
-          </a:effectRef>
-          <a:fontRef idx="minor">
-            <a:schemeClr val="tx1"/>
-          </a:fontRef>
-        </p:style>
-      </p:cxnSp>
-      <p:cxnSp>
-        <p:nvCxnSpPr>
-          <p:cNvPr id="77" name="Connector 77"/>
-          <p:cNvCxnSpPr/>
-          <p:nvPr/>
-        </p:nvCxnSpPr>
-        <p:spPr>
-          <a:xfrm>
-            <a:off x="10210500" y="2736000"/>
-            <a:ext cx="0" cy="180000"/>
-          </a:xfrm>
-          <a:prstGeom prst="line">
-            <a:avLst/>
-          </a:prstGeom>
-          <a:ln w="11430">
-            <a:solidFill>
-              <a:srgbClr val="404040"/>
-            </a:solidFill>
-            <a:tailEnd type="triangle" w="sm" len="sm"/>
-          </a:ln>
-        </p:spPr>
-        <p:style>
-          <a:lnRef idx="2">
-            <a:schemeClr val="accent1"/>
-          </a:lnRef>
-          <a:fillRef idx="0">
-            <a:schemeClr val="accent1"/>
-          </a:fillRef>
-          <a:effectRef idx="1">
-            <a:schemeClr val="accent1"/>
-          </a:effectRef>
-          <a:fontRef idx="minor">
-            <a:schemeClr val="tx1"/>
-          </a:fontRef>
-        </p:style>
-      </p:cxnSp>
-      <p:sp>
-        <p:nvSpPr>
-          <p:cNvPr id="78" name="TextBox 78"/>
-          <p:cNvSpPr txBox="1"/>
-          <p:nvPr/>
-        </p:nvSpPr>
-        <p:spPr>
-          <a:xfrm>
-            <a:off x="10228500" y="2707200"/>
-            <a:ext cx="360000" cy="144000"/>
-          </a:xfrm>
-          <a:prstGeom prst="rect">
-            <a:avLst/>
-          </a:prstGeom>
-          <a:noFill/>
-        </p:spPr>
-        <p:txBody>
-          <a:bodyPr wrap="square">
-            <a:spAutoFit/>
-          </a:bodyPr>
-          <a:lstStyle/>
-          <a:p>
-            <a:r>
-              <a:rPr sz="650" b="1">
-                <a:solidFill>
-                  <a:srgbClr val="333333"/>
-                </a:solidFill>
-                <a:latin typeface="맑은 고딕"/>
-                <a:ea typeface="맑은 고딕"/>
-              </a:rPr>
-              <a:t>YES</a:t>
-            </a:r>
-          </a:p>
-        </p:txBody>
-      </p:sp>
-      <p:cxnSp>
-        <p:nvCxnSpPr>
-          <p:cNvPr id="79" name="Connector 79"/>
-          <p:cNvCxnSpPr/>
-          <p:nvPr/>
-        </p:nvCxnSpPr>
-        <p:spPr>
-          <a:xfrm>
-            <a:off x="10930500" y="2538000"/>
-            <a:ext cx="108000" cy="0"/>
-          </a:xfrm>
-          <a:prstGeom prst="line">
-            <a:avLst/>
-          </a:prstGeom>
-          <a:ln w="11430">
-            <a:solidFill>
-              <a:srgbClr val="404040"/>
-            </a:solidFill>
-          </a:ln>
-        </p:spPr>
-        <p:style>
-          <a:lnRef idx="2">
-            <a:schemeClr val="accent1"/>
-          </a:lnRef>
-          <a:fillRef idx="0">
-            <a:schemeClr val="accent1"/>
-          </a:fillRef>
-          <a:effectRef idx="1">
-            <a:schemeClr val="accent1"/>
-          </a:effectRef>
-          <a:fontRef idx="minor">
-            <a:schemeClr val="tx1"/>
-          </a:fontRef>
-        </p:style>
-      </p:cxnSp>
-      <p:cxnSp>
-        <p:nvCxnSpPr>
-          <p:cNvPr id="80" name="Connector 80"/>
-          <p:cNvCxnSpPr/>
-          <p:nvPr/>
-        </p:nvCxnSpPr>
-        <p:spPr>
-          <a:xfrm>
-            <a:off x="11038500" y="2538000"/>
-            <a:ext cx="0" cy="1458000"/>
-          </a:xfrm>
-          <a:prstGeom prst="line">
-            <a:avLst/>
-          </a:prstGeom>
-          <a:ln w="11430">
-            <a:solidFill>
-              <a:srgbClr val="404040"/>
-            </a:solidFill>
-          </a:ln>
-        </p:spPr>
-        <p:style>
-          <a:lnRef idx="2">
-            <a:schemeClr val="accent1"/>
-          </a:lnRef>
-          <a:fillRef idx="0">
-            <a:schemeClr val="accent1"/>
-          </a:fillRef>
-          <a:effectRef idx="1">
-            <a:schemeClr val="accent1"/>
-          </a:effectRef>
-          <a:fontRef idx="minor">
-            <a:schemeClr val="tx1"/>
-          </a:fontRef>
-        </p:style>
-      </p:cxnSp>
-      <p:cxnSp>
-        <p:nvCxnSpPr>
-          <p:cNvPr id="81" name="Connector 81"/>
-          <p:cNvCxnSpPr/>
-          <p:nvPr/>
-        </p:nvCxnSpPr>
-        <p:spPr>
-          <a:xfrm flipH="1">
-            <a:off x="10858500" y="3996000"/>
-            <a:ext cx="180000" cy="0"/>
-          </a:xfrm>
-          <a:prstGeom prst="line">
-            <a:avLst/>
-          </a:prstGeom>
-          <a:ln w="11430">
-            <a:solidFill>
-              <a:srgbClr val="404040"/>
-            </a:solidFill>
-            <a:tailEnd type="triangle" w="sm" len="sm"/>
-          </a:ln>
-        </p:spPr>
-        <p:style>
-          <a:lnRef idx="2">
-            <a:schemeClr val="accent1"/>
-          </a:lnRef>
-          <a:fillRef idx="0">
-            <a:schemeClr val="accent1"/>
-          </a:fillRef>
-          <a:effectRef idx="1">
-            <a:schemeClr val="accent1"/>
-          </a:effectRef>
-          <a:fontRef idx="minor">
-            <a:schemeClr val="tx1"/>
-          </a:fontRef>
-        </p:style>
-      </p:cxnSp>
-      <p:sp>
-        <p:nvSpPr>
-          <p:cNvPr id="82" name="TextBox 82"/>
-          <p:cNvSpPr txBox="1"/>
-          <p:nvPr/>
-        </p:nvSpPr>
-        <p:spPr>
-          <a:xfrm>
-            <a:off x="10912500" y="2376000"/>
-            <a:ext cx="360000" cy="144000"/>
-          </a:xfrm>
-          <a:prstGeom prst="rect">
-            <a:avLst/>
-          </a:prstGeom>
-          <a:noFill/>
-        </p:spPr>
-        <p:txBody>
-          <a:bodyPr wrap="square">
-            <a:spAutoFit/>
-          </a:bodyPr>
-          <a:lstStyle/>
-          <a:p>
-            <a:r>
-              <a:rPr sz="650" b="1">
-                <a:solidFill>
-                  <a:srgbClr val="333333"/>
-                </a:solidFill>
-                <a:latin typeface="맑은 고딕"/>
-                <a:ea typeface="맑은 고딕"/>
-              </a:rPr>
-              <a:t>NO</a:t>
-            </a:r>
-          </a:p>
-        </p:txBody>
-      </p:sp>
-      <p:cxnSp>
-        <p:nvCxnSpPr>
-          <p:cNvPr id="83" name="Connector 83"/>
-          <p:cNvCxnSpPr/>
-          <p:nvPr/>
-        </p:nvCxnSpPr>
-        <p:spPr>
-          <a:xfrm>
-            <a:off x="10210500" y="3204000"/>
-            <a:ext cx="0" cy="180000"/>
-          </a:xfrm>
-          <a:prstGeom prst="line">
-            <a:avLst/>
-          </a:prstGeom>
-          <a:ln w="11430">
-            <a:solidFill>
-              <a:srgbClr val="404040"/>
-            </a:solidFill>
-            <a:tailEnd type="triangle" w="sm" len="sm"/>
-          </a:ln>
-        </p:spPr>
-        <p:style>
-          <a:lnRef idx="2">
-            <a:schemeClr val="accent1"/>
-          </a:lnRef>
-          <a:fillRef idx="0">
-            <a:schemeClr val="accent1"/>
-          </a:fillRef>
-          <a:effectRef idx="1">
-            <a:schemeClr val="accent1"/>
-          </a:effectRef>
-          <a:fontRef idx="minor">
-            <a:schemeClr val="tx1"/>
-          </a:fontRef>
-        </p:style>
-      </p:cxnSp>
-      <p:cxnSp>
-        <p:nvCxnSpPr>
-          <p:cNvPr id="84" name="Connector 84"/>
-          <p:cNvCxnSpPr/>
-          <p:nvPr/>
-        </p:nvCxnSpPr>
-        <p:spPr>
-          <a:xfrm>
-            <a:off x="2353500" y="3996000"/>
-            <a:ext cx="841500" cy="0"/>
-          </a:xfrm>
-          <a:prstGeom prst="line">
-            <a:avLst/>
-          </a:prstGeom>
-          <a:ln w="11430">
-            <a:solidFill>
-              <a:srgbClr val="404040"/>
-            </a:solidFill>
-          </a:ln>
-        </p:spPr>
-        <p:style>
-          <a:lnRef idx="2">
-            <a:schemeClr val="accent1"/>
-          </a:lnRef>
-          <a:fillRef idx="0">
-            <a:schemeClr val="accent1"/>
-          </a:fillRef>
-          <a:effectRef idx="1">
-            <a:schemeClr val="accent1"/>
-          </a:effectRef>
-          <a:fontRef idx="minor">
-            <a:schemeClr val="tx1"/>
-          </a:fontRef>
-        </p:style>
-      </p:cxnSp>
-      <p:cxnSp>
-        <p:nvCxnSpPr>
-          <p:cNvPr id="85" name="Connector 85"/>
-          <p:cNvCxnSpPr/>
-          <p:nvPr/>
-        </p:nvCxnSpPr>
-        <p:spPr>
-          <a:xfrm flipV="1">
-            <a:off x="3195000" y="2070000"/>
-            <a:ext cx="0" cy="1926000"/>
-          </a:xfrm>
-          <a:prstGeom prst="line">
-            <a:avLst/>
-          </a:prstGeom>
-          <a:ln w="11430">
-            <a:solidFill>
-              <a:srgbClr val="404040"/>
-            </a:solidFill>
-          </a:ln>
-        </p:spPr>
-        <p:style>
-          <a:lnRef idx="2">
-            <a:schemeClr val="accent1"/>
-          </a:lnRef>
-          <a:fillRef idx="0">
-            <a:schemeClr val="accent1"/>
-          </a:fillRef>
-          <a:effectRef idx="1">
-            <a:schemeClr val="accent1"/>
-          </a:effectRef>
-          <a:fontRef idx="minor">
-            <a:schemeClr val="tx1"/>
-          </a:fontRef>
-        </p:style>
-      </p:cxnSp>
-      <p:cxnSp>
-        <p:nvCxnSpPr>
-          <p:cNvPr id="86" name="Connector 86"/>
-          <p:cNvCxnSpPr/>
-          <p:nvPr/>
-        </p:nvCxnSpPr>
-        <p:spPr>
-          <a:xfrm>
-            <a:off x="3195000" y="2070000"/>
-            <a:ext cx="625500" cy="0"/>
-          </a:xfrm>
-          <a:prstGeom prst="line">
-            <a:avLst/>
-          </a:prstGeom>
-          <a:ln w="11430">
-            <a:solidFill>
-              <a:srgbClr val="404040"/>
-            </a:solidFill>
-            <a:tailEnd type="triangle" w="sm" len="sm"/>
-          </a:ln>
-        </p:spPr>
-        <p:style>
-          <a:lnRef idx="2">
-            <a:schemeClr val="accent1"/>
-          </a:lnRef>
-          <a:fillRef idx="0">
-            <a:schemeClr val="accent1"/>
-          </a:fillRef>
-          <a:effectRef idx="1">
-            <a:schemeClr val="accent1"/>
-          </a:effectRef>
-          <a:fontRef idx="minor">
-            <a:schemeClr val="tx1"/>
-          </a:fontRef>
-        </p:style>
-      </p:cxnSp>
-      <p:cxnSp>
-        <p:nvCxnSpPr>
-          <p:cNvPr id="87" name="Connector 87"/>
-          <p:cNvCxnSpPr/>
-          <p:nvPr/>
-        </p:nvCxnSpPr>
-        <p:spPr>
-          <a:xfrm>
-            <a:off x="5188500" y="4104000"/>
-            <a:ext cx="841500" cy="0"/>
-          </a:xfrm>
-          <a:prstGeom prst="line">
-            <a:avLst/>
-          </a:prstGeom>
-          <a:ln w="11430">
-            <a:solidFill>
-              <a:srgbClr val="404040"/>
-            </a:solidFill>
-          </a:ln>
-        </p:spPr>
-        <p:style>
-          <a:lnRef idx="2">
-            <a:schemeClr val="accent1"/>
-          </a:lnRef>
-          <a:fillRef idx="0">
-            <a:schemeClr val="accent1"/>
-          </a:fillRef>
-          <a:effectRef idx="1">
-            <a:schemeClr val="accent1"/>
-          </a:effectRef>
-          <a:fontRef idx="minor">
-            <a:schemeClr val="tx1"/>
-          </a:fontRef>
-        </p:style>
-      </p:cxnSp>
-      <p:cxnSp>
-        <p:nvCxnSpPr>
-          <p:cNvPr id="88" name="Connector 88"/>
-          <p:cNvCxnSpPr/>
-          <p:nvPr/>
-        </p:nvCxnSpPr>
-        <p:spPr>
-          <a:xfrm flipV="1">
-            <a:off x="6030000" y="2016000"/>
-            <a:ext cx="0" cy="2088000"/>
-          </a:xfrm>
-          <a:prstGeom prst="line">
-            <a:avLst/>
-          </a:prstGeom>
-          <a:ln w="11430">
-            <a:solidFill>
-              <a:srgbClr val="404040"/>
-            </a:solidFill>
-          </a:ln>
-        </p:spPr>
-        <p:style>
-          <a:lnRef idx="2">
-            <a:schemeClr val="accent1"/>
-          </a:lnRef>
-          <a:fillRef idx="0">
-            <a:schemeClr val="accent1"/>
-          </a:fillRef>
-          <a:effectRef idx="1">
-            <a:schemeClr val="accent1"/>
-          </a:effectRef>
-          <a:fontRef idx="minor">
-            <a:schemeClr val="tx1"/>
-          </a:fontRef>
-        </p:style>
-      </p:cxnSp>
-      <p:cxnSp>
-        <p:nvCxnSpPr>
-          <p:cNvPr id="89" name="Connector 89"/>
-          <p:cNvCxnSpPr/>
-          <p:nvPr/>
-        </p:nvCxnSpPr>
-        <p:spPr>
-          <a:xfrm>
-            <a:off x="6030000" y="2016000"/>
-            <a:ext cx="697500" cy="0"/>
-          </a:xfrm>
-          <a:prstGeom prst="line">
-            <a:avLst/>
-          </a:prstGeom>
-          <a:ln w="11430">
-            <a:solidFill>
-              <a:srgbClr val="404040"/>
-            </a:solidFill>
-            <a:tailEnd type="triangle" w="sm" len="sm"/>
-          </a:ln>
-        </p:spPr>
-        <p:style>
-          <a:lnRef idx="2">
-            <a:schemeClr val="accent1"/>
-          </a:lnRef>
-          <a:fillRef idx="0">
-            <a:schemeClr val="accent1"/>
-          </a:fillRef>
-          <a:effectRef idx="1">
-            <a:schemeClr val="accent1"/>
-          </a:effectRef>
-          <a:fontRef idx="minor">
-            <a:schemeClr val="tx1"/>
-          </a:fontRef>
-        </p:style>
-      </p:cxnSp>
-      <p:cxnSp>
-        <p:nvCxnSpPr>
-          <p:cNvPr id="90" name="Connector 90"/>
-          <p:cNvCxnSpPr/>
-          <p:nvPr/>
-        </p:nvCxnSpPr>
-        <p:spPr>
-          <a:xfrm>
-            <a:off x="8023500" y="3996000"/>
-            <a:ext cx="841500" cy="0"/>
-          </a:xfrm>
-          <a:prstGeom prst="line">
-            <a:avLst/>
-          </a:prstGeom>
-          <a:ln w="11430">
-            <a:solidFill>
-              <a:srgbClr val="404040"/>
-            </a:solidFill>
-          </a:ln>
-        </p:spPr>
-        <p:style>
-          <a:lnRef idx="2">
-            <a:schemeClr val="accent1"/>
-          </a:lnRef>
-          <a:fillRef idx="0">
-            <a:schemeClr val="accent1"/>
-          </a:fillRef>
-          <a:effectRef idx="1">
-            <a:schemeClr val="accent1"/>
-          </a:effectRef>
-          <a:fontRef idx="minor">
-            <a:schemeClr val="tx1"/>
-          </a:fontRef>
-        </p:style>
-      </p:cxnSp>
-      <p:cxnSp>
-        <p:nvCxnSpPr>
-          <p:cNvPr id="91" name="Connector 91"/>
-          <p:cNvCxnSpPr/>
-          <p:nvPr/>
-        </p:nvCxnSpPr>
-        <p:spPr>
-          <a:xfrm flipV="1">
-            <a:off x="8865000" y="2016000"/>
-            <a:ext cx="0" cy="1980000"/>
-          </a:xfrm>
-          <a:prstGeom prst="line">
-            <a:avLst/>
-          </a:prstGeom>
-          <a:ln w="11430">
-            <a:solidFill>
-              <a:srgbClr val="404040"/>
-            </a:solidFill>
-          </a:ln>
-        </p:spPr>
-        <p:style>
-          <a:lnRef idx="2">
-            <a:schemeClr val="accent1"/>
-          </a:lnRef>
-          <a:fillRef idx="0">
-            <a:schemeClr val="accent1"/>
-          </a:fillRef>
-          <a:effectRef idx="1">
-            <a:schemeClr val="accent1"/>
-          </a:effectRef>
-          <a:fontRef idx="minor">
-            <a:schemeClr val="tx1"/>
-          </a:fontRef>
-        </p:style>
-      </p:cxnSp>
-      <p:cxnSp>
-        <p:nvCxnSpPr>
-          <p:cNvPr id="92" name="Connector 92"/>
-          <p:cNvCxnSpPr/>
-          <p:nvPr/>
-        </p:nvCxnSpPr>
-        <p:spPr>
-          <a:xfrm>
-            <a:off x="8865000" y="2016000"/>
-            <a:ext cx="697500" cy="0"/>
-          </a:xfrm>
-          <a:prstGeom prst="line">
-            <a:avLst/>
-          </a:prstGeom>
-          <a:ln w="11430">
-            <a:solidFill>
-              <a:srgbClr val="404040"/>
-            </a:solidFill>
-            <a:tailEnd type="triangle" w="sm" len="sm"/>
-          </a:ln>
-        </p:spPr>
-        <p:style>
-          <a:lnRef idx="2">
-            <a:schemeClr val="accent1"/>
-          </a:lnRef>
-          <a:fillRef idx="0">
-            <a:schemeClr val="accent1"/>
-          </a:fillRef>
-          <a:effectRef idx="1">
-            <a:schemeClr val="accent1"/>
-          </a:effectRef>
-          <a:fontRef idx="minor">
-            <a:schemeClr val="tx1"/>
-          </a:fontRef>
-        </p:style>
-      </p:cxnSp>
-      <p:sp>
-        <p:nvSpPr>
-          <p:cNvPr id="93" name="TextBox 92"/>
-          <p:cNvSpPr txBox="1"/>
-          <p:nvPr/>
-        </p:nvSpPr>
-        <p:spPr>
-          <a:xfrm>
-            <a:off x="216000" y="6516000"/>
-            <a:ext cx="11736000" cy="252000"/>
-          </a:xfrm>
-          <a:prstGeom prst="rect">
-            <a:avLst/>
-          </a:prstGeom>
-          <a:noFill/>
-        </p:spPr>
-        <p:txBody>
-          <a:bodyPr wrap="square">
-            <a:spAutoFit/>
-          </a:bodyPr>
-          <a:lstStyle/>
-          <a:p>
-            <a:r>
-              <a:rPr sz="900" b="1">
-                <a:solidFill>
-                  <a:srgbClr val="C01E1E"/>
-                </a:solidFill>
-                <a:latin typeface="맑은 고딕"/>
-              </a:rPr>
-              <a:t>[예시] 실제 프로젝트(가명)의 Logic process 장. 판단 기준과 실패 경로, 저장 위치를 적는다. 생성할 때 이 장은 빠진다.</a:t>
-            </a:r>
-          </a:p>
-        </p:txBody>
-      </p:sp>
-    </p:spTree>
-  </p:cSld>
-  <p:clrMapOvr>
-    <a:masterClrMapping/>
-  </p:clrMapOvr>
-</p:sld>
-</file>
-
 <file path=ppt/slides/slide9.xml><?xml version="1.0" encoding="utf-8"?>
 <p:sld xmlns:a="http://schemas.openxmlformats.org/drawingml/2006/main" xmlns:r="http://schemas.openxmlformats.org/officeDocument/2006/relationships" xmlns:p="http://schemas.openxmlformats.org/presentationml/2006/main">
   <p:cSld>
